--- a/cuhk-csc-1004/slides/CSC1004 Tutorial 9.pptx
+++ b/cuhk-csc-1004/slides/CSC1004 Tutorial 9.pptx
@@ -3,28 +3,28 @@
 <p:presentation xmlns:a="http://schemas.openxmlformats.org/drawingml/2006/main" xmlns:r="http://schemas.openxmlformats.org/officeDocument/2006/relationships" xmlns:p="http://schemas.openxmlformats.org/presentationml/2006/main">
   <p:sldMasterIdLst>
     <p:sldMasterId id="2147483648" r:id="rId1"/>
-    <p:sldMasterId id="2147483662" r:id="rId2"/>
-    <p:sldMasterId id="2147483676" r:id="rId3"/>
-    <p:sldMasterId id="2147483690" r:id="rId4"/>
+    <p:sldMasterId id="2147483662" r:id="rId3"/>
+    <p:sldMasterId id="2147483676" r:id="rId4"/>
+    <p:sldMasterId id="2147483690" r:id="rId5"/>
   </p:sldMasterIdLst>
   <p:notesMasterIdLst>
-    <p:notesMasterId r:id="rId14"/>
+    <p:notesMasterId r:id="rId7"/>
   </p:notesMasterIdLst>
   <p:sldIdLst>
-    <p:sldId id="263" r:id="rId5"/>
-    <p:sldId id="271" r:id="rId6"/>
-    <p:sldId id="272" r:id="rId7"/>
-    <p:sldId id="273" r:id="rId8"/>
-    <p:sldId id="282" r:id="rId9"/>
-    <p:sldId id="283" r:id="rId10"/>
-    <p:sldId id="284" r:id="rId11"/>
-    <p:sldId id="285" r:id="rId12"/>
-    <p:sldId id="286" r:id="rId13"/>
+    <p:sldId id="263" r:id="rId6"/>
+    <p:sldId id="271" r:id="rId8"/>
+    <p:sldId id="272" r:id="rId9"/>
+    <p:sldId id="273" r:id="rId10"/>
+    <p:sldId id="282" r:id="rId11"/>
+    <p:sldId id="283" r:id="rId12"/>
+    <p:sldId id="284" r:id="rId13"/>
+    <p:sldId id="285" r:id="rId14"/>
+    <p:sldId id="286" r:id="rId15"/>
   </p:sldIdLst>
   <p:sldSz cx="12192000" cy="6858000"/>
   <p:notesSz cx="6858000" cy="9144000"/>
   <p:custDataLst>
-    <p:tags r:id="rId15"/>
+    <p:tags r:id="rId19"/>
   </p:custDataLst>
   <p:defaultTextStyle>
     <a:defPPr>
@@ -121,11 +121,6 @@
       </a:defRPr>
     </a:lvl9pPr>
   </p:defaultTextStyle>
-  <p:extLst>
-    <p:ext uri="{EFAFB233-063F-42B5-8137-9DF3F51BA10A}">
-      <p15:sldGuideLst xmlns:p15="http://schemas.microsoft.com/office/powerpoint/2012/main"/>
-    </p:ext>
-  </p:extLst>
 </p:presentation>
 </file>
 
@@ -211,7 +206,6 @@
           <a:p>
             <a:fld id="{D2A48B96-639E-45A3-A0BA-2464DFDB1FAA}" type="datetimeFigureOut">
               <a:rPr lang="zh-CN" altLang="en-US" smtClean="0"/>
-              <a:t>2025/4/7</a:t>
             </a:fld>
             <a:endParaRPr lang="zh-CN" altLang="en-US"/>
           </a:p>
@@ -278,6 +272,7 @@
               <a:rPr lang="zh-CN" altLang="en-US"/>
               <a:t>单击此处编辑母版文本样式</a:t>
             </a:r>
+            <a:endParaRPr lang="zh-CN" altLang="en-US"/>
           </a:p>
           <a:p>
             <a:pPr lvl="1"/>
@@ -285,6 +280,7 @@
               <a:rPr lang="zh-CN" altLang="en-US"/>
               <a:t>第二级</a:t>
             </a:r>
+            <a:endParaRPr lang="zh-CN" altLang="en-US"/>
           </a:p>
           <a:p>
             <a:pPr lvl="2"/>
@@ -292,6 +288,7 @@
               <a:rPr lang="zh-CN" altLang="en-US"/>
               <a:t>第三级</a:t>
             </a:r>
+            <a:endParaRPr lang="zh-CN" altLang="en-US"/>
           </a:p>
           <a:p>
             <a:pPr lvl="3"/>
@@ -299,6 +296,7 @@
               <a:rPr lang="zh-CN" altLang="en-US"/>
               <a:t>第四级</a:t>
             </a:r>
+            <a:endParaRPr lang="zh-CN" altLang="en-US"/>
           </a:p>
           <a:p>
             <a:pPr lvl="4"/>
@@ -306,6 +304,7 @@
               <a:rPr lang="zh-CN" altLang="en-US"/>
               <a:t>第五级</a:t>
             </a:r>
+            <a:endParaRPr lang="zh-CN" altLang="en-US"/>
           </a:p>
         </p:txBody>
       </p:sp>
@@ -369,7 +368,6 @@
           <a:p>
             <a:fld id="{A6837353-30EB-4A48-80EB-173D804AEFBD}" type="slidenum">
               <a:rPr lang="zh-CN" altLang="en-US" smtClean="0"/>
-              <a:t>‹#›</a:t>
             </a:fld>
             <a:endParaRPr lang="zh-CN" altLang="en-US"/>
           </a:p>
@@ -538,7 +536,6 @@
           <a:p>
             <a:fld id="{F7021451-1387-4CA6-816F-3879F97B5CBC}" type="slidenum">
               <a:rPr lang="en-US"/>
-              <a:t>1</a:t>
             </a:fld>
             <a:endParaRPr lang="en-US"/>
           </a:p>
@@ -617,7 +614,6 @@
           <a:p>
             <a:fld id="{F7021451-1387-4CA6-816F-3879F97B5CBC}" type="slidenum">
               <a:rPr lang="en-US"/>
-              <a:t>2</a:t>
             </a:fld>
             <a:endParaRPr lang="en-US"/>
           </a:p>
@@ -696,7 +692,6 @@
           <a:p>
             <a:fld id="{F7021451-1387-4CA6-816F-3879F97B5CBC}" type="slidenum">
               <a:rPr lang="en-US"/>
-              <a:t>3</a:t>
             </a:fld>
             <a:endParaRPr lang="en-US"/>
           </a:p>
@@ -775,7 +770,6 @@
           <a:p>
             <a:fld id="{F7021451-1387-4CA6-816F-3879F97B5CBC}" type="slidenum">
               <a:rPr lang="en-US"/>
-              <a:t>4</a:t>
             </a:fld>
             <a:endParaRPr lang="en-US"/>
           </a:p>
@@ -854,7 +848,6 @@
           <a:p>
             <a:fld id="{F7021451-1387-4CA6-816F-3879F97B5CBC}" type="slidenum">
               <a:rPr lang="en-US"/>
-              <a:t>5</a:t>
             </a:fld>
             <a:endParaRPr lang="en-US"/>
           </a:p>
@@ -933,7 +926,6 @@
           <a:p>
             <a:fld id="{F7021451-1387-4CA6-816F-3879F97B5CBC}" type="slidenum">
               <a:rPr lang="en-US"/>
-              <a:t>6</a:t>
             </a:fld>
             <a:endParaRPr lang="en-US"/>
           </a:p>
@@ -1012,7 +1004,6 @@
           <a:p>
             <a:fld id="{F7021451-1387-4CA6-816F-3879F97B5CBC}" type="slidenum">
               <a:rPr lang="en-US"/>
-              <a:t>7</a:t>
             </a:fld>
             <a:endParaRPr lang="en-US"/>
           </a:p>
@@ -1091,7 +1082,6 @@
           <a:p>
             <a:fld id="{F7021451-1387-4CA6-816F-3879F97B5CBC}" type="slidenum">
               <a:rPr lang="en-US"/>
-              <a:t>8</a:t>
             </a:fld>
             <a:endParaRPr lang="en-US"/>
           </a:p>
@@ -1170,7 +1160,6 @@
           <a:p>
             <a:fld id="{F7021451-1387-4CA6-816F-3879F97B5CBC}" type="slidenum">
               <a:rPr lang="en-US"/>
-              <a:t>9</a:t>
             </a:fld>
             <a:endParaRPr lang="en-US"/>
           </a:p>
@@ -1229,6 +1218,7 @@
               <a:rPr lang="zh-CN" altLang="en-US"/>
               <a:t>单击此处编辑母版标题样式</a:t>
             </a:r>
+            <a:endParaRPr lang="zh-CN" altLang="en-US"/>
           </a:p>
         </p:txBody>
       </p:sp>
@@ -1293,6 +1283,7 @@
               <a:rPr lang="zh-CN" altLang="en-US"/>
               <a:t>单击此处编辑母版副标题样式</a:t>
             </a:r>
+            <a:endParaRPr lang="zh-CN" altLang="en-US"/>
           </a:p>
         </p:txBody>
       </p:sp>
@@ -1313,7 +1304,6 @@
           <a:p>
             <a:fld id="{D997B5FA-0921-464F-AAE1-844C04324D75}" type="datetimeFigureOut">
               <a:rPr lang="zh-CN" altLang="en-US" smtClean="0"/>
-              <a:t>2025/4/7</a:t>
             </a:fld>
             <a:endParaRPr lang="zh-CN" altLang="en-US"/>
           </a:p>
@@ -1355,7 +1345,6 @@
           <a:p>
             <a:fld id="{565CE74E-AB26-4998-AD42-012C4C1AD076}" type="slidenum">
               <a:rPr lang="zh-CN" altLang="en-US" smtClean="0"/>
-              <a:t>‹#›</a:t>
             </a:fld>
             <a:endParaRPr lang="zh-CN" altLang="en-US"/>
           </a:p>
@@ -1405,6 +1394,7 @@
               <a:rPr lang="zh-CN" altLang="en-US"/>
               <a:t>单击此处编辑母版标题样式</a:t>
             </a:r>
+            <a:endParaRPr lang="zh-CN" altLang="en-US"/>
           </a:p>
         </p:txBody>
       </p:sp>
@@ -1428,6 +1418,7 @@
               <a:rPr lang="zh-CN" altLang="en-US"/>
               <a:t>单击此处编辑母版文本样式</a:t>
             </a:r>
+            <a:endParaRPr lang="zh-CN" altLang="en-US"/>
           </a:p>
           <a:p>
             <a:pPr lvl="1"/>
@@ -1435,6 +1426,7 @@
               <a:rPr lang="zh-CN" altLang="en-US"/>
               <a:t>第二级</a:t>
             </a:r>
+            <a:endParaRPr lang="zh-CN" altLang="en-US"/>
           </a:p>
           <a:p>
             <a:pPr lvl="2"/>
@@ -1442,6 +1434,7 @@
               <a:rPr lang="zh-CN" altLang="en-US"/>
               <a:t>第三级</a:t>
             </a:r>
+            <a:endParaRPr lang="zh-CN" altLang="en-US"/>
           </a:p>
           <a:p>
             <a:pPr lvl="3"/>
@@ -1449,6 +1442,7 @@
               <a:rPr lang="zh-CN" altLang="en-US"/>
               <a:t>第四级</a:t>
             </a:r>
+            <a:endParaRPr lang="zh-CN" altLang="en-US"/>
           </a:p>
           <a:p>
             <a:pPr lvl="4"/>
@@ -1456,6 +1450,7 @@
               <a:rPr lang="zh-CN" altLang="en-US"/>
               <a:t>第五级</a:t>
             </a:r>
+            <a:endParaRPr lang="zh-CN" altLang="en-US"/>
           </a:p>
         </p:txBody>
       </p:sp>
@@ -1476,7 +1471,6 @@
           <a:p>
             <a:fld id="{D997B5FA-0921-464F-AAE1-844C04324D75}" type="datetimeFigureOut">
               <a:rPr lang="zh-CN" altLang="en-US" smtClean="0"/>
-              <a:t>2025/4/7</a:t>
             </a:fld>
             <a:endParaRPr lang="zh-CN" altLang="en-US"/>
           </a:p>
@@ -1518,7 +1512,6 @@
           <a:p>
             <a:fld id="{565CE74E-AB26-4998-AD42-012C4C1AD076}" type="slidenum">
               <a:rPr lang="zh-CN" altLang="en-US" smtClean="0"/>
-              <a:t>‹#›</a:t>
             </a:fld>
             <a:endParaRPr lang="zh-CN" altLang="en-US"/>
           </a:p>
@@ -1573,6 +1566,7 @@
               <a:rPr lang="zh-CN" altLang="en-US"/>
               <a:t>单击此处编辑母版标题样式</a:t>
             </a:r>
+            <a:endParaRPr lang="zh-CN" altLang="en-US"/>
           </a:p>
         </p:txBody>
       </p:sp>
@@ -1601,6 +1595,7 @@
               <a:rPr lang="zh-CN" altLang="en-US"/>
               <a:t>单击此处编辑母版文本样式</a:t>
             </a:r>
+            <a:endParaRPr lang="zh-CN" altLang="en-US"/>
           </a:p>
           <a:p>
             <a:pPr lvl="1"/>
@@ -1608,6 +1603,7 @@
               <a:rPr lang="zh-CN" altLang="en-US"/>
               <a:t>第二级</a:t>
             </a:r>
+            <a:endParaRPr lang="zh-CN" altLang="en-US"/>
           </a:p>
           <a:p>
             <a:pPr lvl="2"/>
@@ -1615,6 +1611,7 @@
               <a:rPr lang="zh-CN" altLang="en-US"/>
               <a:t>第三级</a:t>
             </a:r>
+            <a:endParaRPr lang="zh-CN" altLang="en-US"/>
           </a:p>
           <a:p>
             <a:pPr lvl="3"/>
@@ -1622,6 +1619,7 @@
               <a:rPr lang="zh-CN" altLang="en-US"/>
               <a:t>第四级</a:t>
             </a:r>
+            <a:endParaRPr lang="zh-CN" altLang="en-US"/>
           </a:p>
           <a:p>
             <a:pPr lvl="4"/>
@@ -1629,6 +1627,7 @@
               <a:rPr lang="zh-CN" altLang="en-US"/>
               <a:t>第五级</a:t>
             </a:r>
+            <a:endParaRPr lang="zh-CN" altLang="en-US"/>
           </a:p>
         </p:txBody>
       </p:sp>
@@ -1649,7 +1648,6 @@
           <a:p>
             <a:fld id="{D997B5FA-0921-464F-AAE1-844C04324D75}" type="datetimeFigureOut">
               <a:rPr lang="zh-CN" altLang="en-US" smtClean="0"/>
-              <a:t>2025/4/7</a:t>
             </a:fld>
             <a:endParaRPr lang="zh-CN" altLang="en-US"/>
           </a:p>
@@ -1691,7 +1689,6 @@
           <a:p>
             <a:fld id="{565CE74E-AB26-4998-AD42-012C4C1AD076}" type="slidenum">
               <a:rPr lang="zh-CN" altLang="en-US" smtClean="0"/>
-              <a:t>‹#›</a:t>
             </a:fld>
             <a:endParaRPr lang="zh-CN" altLang="en-US"/>
           </a:p>
@@ -1876,6 +1873,7 @@
               <a:rPr lang="zh-CN" altLang="en-US"/>
               <a:t>单击此处编辑母版标题样式</a:t>
             </a:r>
+            <a:endParaRPr lang="zh-CN" altLang="en-US"/>
           </a:p>
         </p:txBody>
       </p:sp>
@@ -1940,6 +1938,7 @@
               <a:rPr lang="zh-CN" altLang="en-US"/>
               <a:t>单击此处编辑母版副标题样式</a:t>
             </a:r>
+            <a:endParaRPr lang="zh-CN" altLang="en-US"/>
           </a:p>
         </p:txBody>
       </p:sp>
@@ -1960,7 +1959,6 @@
           <a:p>
             <a:fld id="{D997B5FA-0921-464F-AAE1-844C04324D75}" type="datetimeFigureOut">
               <a:rPr lang="zh-CN" altLang="en-US" smtClean="0"/>
-              <a:t>2025/4/7</a:t>
             </a:fld>
             <a:endParaRPr lang="zh-CN" altLang="en-US"/>
           </a:p>
@@ -2002,7 +2000,6 @@
           <a:p>
             <a:fld id="{565CE74E-AB26-4998-AD42-012C4C1AD076}" type="slidenum">
               <a:rPr lang="zh-CN" altLang="en-US" smtClean="0"/>
-              <a:t>‹#›</a:t>
             </a:fld>
             <a:endParaRPr lang="zh-CN" altLang="en-US"/>
           </a:p>
@@ -2052,6 +2049,7 @@
               <a:rPr lang="zh-CN" altLang="en-US"/>
               <a:t>单击此处编辑母版标题样式</a:t>
             </a:r>
+            <a:endParaRPr lang="zh-CN" altLang="en-US"/>
           </a:p>
         </p:txBody>
       </p:sp>
@@ -2075,6 +2073,7 @@
               <a:rPr lang="zh-CN" altLang="en-US"/>
               <a:t>单击此处编辑母版文本样式</a:t>
             </a:r>
+            <a:endParaRPr lang="zh-CN" altLang="en-US"/>
           </a:p>
           <a:p>
             <a:pPr lvl="1"/>
@@ -2082,6 +2081,7 @@
               <a:rPr lang="zh-CN" altLang="en-US"/>
               <a:t>第二级</a:t>
             </a:r>
+            <a:endParaRPr lang="zh-CN" altLang="en-US"/>
           </a:p>
           <a:p>
             <a:pPr lvl="2"/>
@@ -2089,6 +2089,7 @@
               <a:rPr lang="zh-CN" altLang="en-US"/>
               <a:t>第三级</a:t>
             </a:r>
+            <a:endParaRPr lang="zh-CN" altLang="en-US"/>
           </a:p>
           <a:p>
             <a:pPr lvl="3"/>
@@ -2096,6 +2097,7 @@
               <a:rPr lang="zh-CN" altLang="en-US"/>
               <a:t>第四级</a:t>
             </a:r>
+            <a:endParaRPr lang="zh-CN" altLang="en-US"/>
           </a:p>
           <a:p>
             <a:pPr lvl="4"/>
@@ -2103,6 +2105,7 @@
               <a:rPr lang="zh-CN" altLang="en-US"/>
               <a:t>第五级</a:t>
             </a:r>
+            <a:endParaRPr lang="zh-CN" altLang="en-US"/>
           </a:p>
         </p:txBody>
       </p:sp>
@@ -2123,7 +2126,6 @@
           <a:p>
             <a:fld id="{D997B5FA-0921-464F-AAE1-844C04324D75}" type="datetimeFigureOut">
               <a:rPr lang="zh-CN" altLang="en-US" smtClean="0"/>
-              <a:t>2025/4/7</a:t>
             </a:fld>
             <a:endParaRPr lang="zh-CN" altLang="en-US"/>
           </a:p>
@@ -2165,7 +2167,6 @@
           <a:p>
             <a:fld id="{565CE74E-AB26-4998-AD42-012C4C1AD076}" type="slidenum">
               <a:rPr lang="zh-CN" altLang="en-US" smtClean="0"/>
-              <a:t>‹#›</a:t>
             </a:fld>
             <a:endParaRPr lang="zh-CN" altLang="en-US"/>
           </a:p>
@@ -2224,6 +2225,7 @@
               <a:rPr lang="zh-CN" altLang="en-US"/>
               <a:t>单击此处编辑母版标题样式</a:t>
             </a:r>
+            <a:endParaRPr lang="zh-CN" altLang="en-US"/>
           </a:p>
         </p:txBody>
       </p:sp>
@@ -2343,6 +2345,7 @@
               <a:rPr lang="zh-CN" altLang="en-US"/>
               <a:t>单击此处编辑母版文本样式</a:t>
             </a:r>
+            <a:endParaRPr lang="zh-CN" altLang="en-US"/>
           </a:p>
         </p:txBody>
       </p:sp>
@@ -2363,7 +2366,6 @@
           <a:p>
             <a:fld id="{D997B5FA-0921-464F-AAE1-844C04324D75}" type="datetimeFigureOut">
               <a:rPr lang="zh-CN" altLang="en-US" smtClean="0"/>
-              <a:t>2025/4/7</a:t>
             </a:fld>
             <a:endParaRPr lang="zh-CN" altLang="en-US"/>
           </a:p>
@@ -2405,7 +2407,6 @@
           <a:p>
             <a:fld id="{565CE74E-AB26-4998-AD42-012C4C1AD076}" type="slidenum">
               <a:rPr lang="zh-CN" altLang="en-US" smtClean="0"/>
-              <a:t>‹#›</a:t>
             </a:fld>
             <a:endParaRPr lang="zh-CN" altLang="en-US"/>
           </a:p>
@@ -2455,6 +2456,7 @@
               <a:rPr lang="zh-CN" altLang="en-US"/>
               <a:t>单击此处编辑母版标题样式</a:t>
             </a:r>
+            <a:endParaRPr lang="zh-CN" altLang="en-US"/>
           </a:p>
         </p:txBody>
       </p:sp>
@@ -2483,6 +2485,7 @@
               <a:rPr lang="zh-CN" altLang="en-US"/>
               <a:t>单击此处编辑母版文本样式</a:t>
             </a:r>
+            <a:endParaRPr lang="zh-CN" altLang="en-US"/>
           </a:p>
           <a:p>
             <a:pPr lvl="1"/>
@@ -2490,6 +2493,7 @@
               <a:rPr lang="zh-CN" altLang="en-US"/>
               <a:t>第二级</a:t>
             </a:r>
+            <a:endParaRPr lang="zh-CN" altLang="en-US"/>
           </a:p>
           <a:p>
             <a:pPr lvl="2"/>
@@ -2497,6 +2501,7 @@
               <a:rPr lang="zh-CN" altLang="en-US"/>
               <a:t>第三级</a:t>
             </a:r>
+            <a:endParaRPr lang="zh-CN" altLang="en-US"/>
           </a:p>
           <a:p>
             <a:pPr lvl="3"/>
@@ -2504,6 +2509,7 @@
               <a:rPr lang="zh-CN" altLang="en-US"/>
               <a:t>第四级</a:t>
             </a:r>
+            <a:endParaRPr lang="zh-CN" altLang="en-US"/>
           </a:p>
           <a:p>
             <a:pPr lvl="4"/>
@@ -2511,6 +2517,7 @@
               <a:rPr lang="zh-CN" altLang="en-US"/>
               <a:t>第五级</a:t>
             </a:r>
+            <a:endParaRPr lang="zh-CN" altLang="en-US"/>
           </a:p>
         </p:txBody>
       </p:sp>
@@ -2539,6 +2546,7 @@
               <a:rPr lang="zh-CN" altLang="en-US"/>
               <a:t>单击此处编辑母版文本样式</a:t>
             </a:r>
+            <a:endParaRPr lang="zh-CN" altLang="en-US"/>
           </a:p>
           <a:p>
             <a:pPr lvl="1"/>
@@ -2546,6 +2554,7 @@
               <a:rPr lang="zh-CN" altLang="en-US"/>
               <a:t>第二级</a:t>
             </a:r>
+            <a:endParaRPr lang="zh-CN" altLang="en-US"/>
           </a:p>
           <a:p>
             <a:pPr lvl="2"/>
@@ -2553,6 +2562,7 @@
               <a:rPr lang="zh-CN" altLang="en-US"/>
               <a:t>第三级</a:t>
             </a:r>
+            <a:endParaRPr lang="zh-CN" altLang="en-US"/>
           </a:p>
           <a:p>
             <a:pPr lvl="3"/>
@@ -2560,6 +2570,7 @@
               <a:rPr lang="zh-CN" altLang="en-US"/>
               <a:t>第四级</a:t>
             </a:r>
+            <a:endParaRPr lang="zh-CN" altLang="en-US"/>
           </a:p>
           <a:p>
             <a:pPr lvl="4"/>
@@ -2567,6 +2578,7 @@
               <a:rPr lang="zh-CN" altLang="en-US"/>
               <a:t>第五级</a:t>
             </a:r>
+            <a:endParaRPr lang="zh-CN" altLang="en-US"/>
           </a:p>
         </p:txBody>
       </p:sp>
@@ -2587,7 +2599,6 @@
           <a:p>
             <a:fld id="{D997B5FA-0921-464F-AAE1-844C04324D75}" type="datetimeFigureOut">
               <a:rPr lang="zh-CN" altLang="en-US" smtClean="0"/>
-              <a:t>2025/4/7</a:t>
             </a:fld>
             <a:endParaRPr lang="zh-CN" altLang="en-US"/>
           </a:p>
@@ -2629,7 +2640,6 @@
           <a:p>
             <a:fld id="{565CE74E-AB26-4998-AD42-012C4C1AD076}" type="slidenum">
               <a:rPr lang="zh-CN" altLang="en-US" smtClean="0"/>
-              <a:t>‹#›</a:t>
             </a:fld>
             <a:endParaRPr lang="zh-CN" altLang="en-US"/>
           </a:p>
@@ -2684,6 +2694,7 @@
               <a:rPr lang="zh-CN" altLang="en-US"/>
               <a:t>单击此处编辑母版标题样式</a:t>
             </a:r>
+            <a:endParaRPr lang="zh-CN" altLang="en-US"/>
           </a:p>
         </p:txBody>
       </p:sp>
@@ -2749,6 +2760,7 @@
               <a:rPr lang="zh-CN" altLang="en-US"/>
               <a:t>单击此处编辑母版文本样式</a:t>
             </a:r>
+            <a:endParaRPr lang="zh-CN" altLang="en-US"/>
           </a:p>
         </p:txBody>
       </p:sp>
@@ -2777,6 +2789,7 @@
               <a:rPr lang="zh-CN" altLang="en-US"/>
               <a:t>单击此处编辑母版文本样式</a:t>
             </a:r>
+            <a:endParaRPr lang="zh-CN" altLang="en-US"/>
           </a:p>
           <a:p>
             <a:pPr lvl="1"/>
@@ -2784,6 +2797,7 @@
               <a:rPr lang="zh-CN" altLang="en-US"/>
               <a:t>第二级</a:t>
             </a:r>
+            <a:endParaRPr lang="zh-CN" altLang="en-US"/>
           </a:p>
           <a:p>
             <a:pPr lvl="2"/>
@@ -2791,6 +2805,7 @@
               <a:rPr lang="zh-CN" altLang="en-US"/>
               <a:t>第三级</a:t>
             </a:r>
+            <a:endParaRPr lang="zh-CN" altLang="en-US"/>
           </a:p>
           <a:p>
             <a:pPr lvl="3"/>
@@ -2798,6 +2813,7 @@
               <a:rPr lang="zh-CN" altLang="en-US"/>
               <a:t>第四级</a:t>
             </a:r>
+            <a:endParaRPr lang="zh-CN" altLang="en-US"/>
           </a:p>
           <a:p>
             <a:pPr lvl="4"/>
@@ -2805,6 +2821,7 @@
               <a:rPr lang="zh-CN" altLang="en-US"/>
               <a:t>第五级</a:t>
             </a:r>
+            <a:endParaRPr lang="zh-CN" altLang="en-US"/>
           </a:p>
         </p:txBody>
       </p:sp>
@@ -2870,6 +2887,7 @@
               <a:rPr lang="zh-CN" altLang="en-US"/>
               <a:t>单击此处编辑母版文本样式</a:t>
             </a:r>
+            <a:endParaRPr lang="zh-CN" altLang="en-US"/>
           </a:p>
         </p:txBody>
       </p:sp>
@@ -2898,6 +2916,7 @@
               <a:rPr lang="zh-CN" altLang="en-US"/>
               <a:t>单击此处编辑母版文本样式</a:t>
             </a:r>
+            <a:endParaRPr lang="zh-CN" altLang="en-US"/>
           </a:p>
           <a:p>
             <a:pPr lvl="1"/>
@@ -2905,6 +2924,7 @@
               <a:rPr lang="zh-CN" altLang="en-US"/>
               <a:t>第二级</a:t>
             </a:r>
+            <a:endParaRPr lang="zh-CN" altLang="en-US"/>
           </a:p>
           <a:p>
             <a:pPr lvl="2"/>
@@ -2912,6 +2932,7 @@
               <a:rPr lang="zh-CN" altLang="en-US"/>
               <a:t>第三级</a:t>
             </a:r>
+            <a:endParaRPr lang="zh-CN" altLang="en-US"/>
           </a:p>
           <a:p>
             <a:pPr lvl="3"/>
@@ -2919,6 +2940,7 @@
               <a:rPr lang="zh-CN" altLang="en-US"/>
               <a:t>第四级</a:t>
             </a:r>
+            <a:endParaRPr lang="zh-CN" altLang="en-US"/>
           </a:p>
           <a:p>
             <a:pPr lvl="4"/>
@@ -2926,6 +2948,7 @@
               <a:rPr lang="zh-CN" altLang="en-US"/>
               <a:t>第五级</a:t>
             </a:r>
+            <a:endParaRPr lang="zh-CN" altLang="en-US"/>
           </a:p>
         </p:txBody>
       </p:sp>
@@ -2946,7 +2969,6 @@
           <a:p>
             <a:fld id="{D997B5FA-0921-464F-AAE1-844C04324D75}" type="datetimeFigureOut">
               <a:rPr lang="zh-CN" altLang="en-US" smtClean="0"/>
-              <a:t>2025/4/7</a:t>
             </a:fld>
             <a:endParaRPr lang="zh-CN" altLang="en-US"/>
           </a:p>
@@ -2988,7 +3010,6 @@
           <a:p>
             <a:fld id="{565CE74E-AB26-4998-AD42-012C4C1AD076}" type="slidenum">
               <a:rPr lang="zh-CN" altLang="en-US" smtClean="0"/>
-              <a:t>‹#›</a:t>
             </a:fld>
             <a:endParaRPr lang="zh-CN" altLang="en-US"/>
           </a:p>
@@ -3038,6 +3059,7 @@
               <a:rPr lang="zh-CN" altLang="en-US"/>
               <a:t>单击此处编辑母版标题样式</a:t>
             </a:r>
+            <a:endParaRPr lang="zh-CN" altLang="en-US"/>
           </a:p>
         </p:txBody>
       </p:sp>
@@ -3058,7 +3080,6 @@
           <a:p>
             <a:fld id="{D997B5FA-0921-464F-AAE1-844C04324D75}" type="datetimeFigureOut">
               <a:rPr lang="zh-CN" altLang="en-US" smtClean="0"/>
-              <a:t>2025/4/7</a:t>
             </a:fld>
             <a:endParaRPr lang="zh-CN" altLang="en-US"/>
           </a:p>
@@ -3100,7 +3121,6 @@
           <a:p>
             <a:fld id="{565CE74E-AB26-4998-AD42-012C4C1AD076}" type="slidenum">
               <a:rPr lang="zh-CN" altLang="en-US" smtClean="0"/>
-              <a:t>‹#›</a:t>
             </a:fld>
             <a:endParaRPr lang="zh-CN" altLang="en-US"/>
           </a:p>
@@ -3150,6 +3170,7 @@
               <a:rPr lang="zh-CN" altLang="en-US"/>
               <a:t>单击此处编辑母版标题样式</a:t>
             </a:r>
+            <a:endParaRPr lang="zh-CN" altLang="en-US"/>
           </a:p>
         </p:txBody>
       </p:sp>
@@ -3173,6 +3194,7 @@
               <a:rPr lang="zh-CN" altLang="en-US"/>
               <a:t>单击此处编辑母版文本样式</a:t>
             </a:r>
+            <a:endParaRPr lang="zh-CN" altLang="en-US"/>
           </a:p>
           <a:p>
             <a:pPr lvl="1"/>
@@ -3180,6 +3202,7 @@
               <a:rPr lang="zh-CN" altLang="en-US"/>
               <a:t>第二级</a:t>
             </a:r>
+            <a:endParaRPr lang="zh-CN" altLang="en-US"/>
           </a:p>
           <a:p>
             <a:pPr lvl="2"/>
@@ -3187,6 +3210,7 @@
               <a:rPr lang="zh-CN" altLang="en-US"/>
               <a:t>第三级</a:t>
             </a:r>
+            <a:endParaRPr lang="zh-CN" altLang="en-US"/>
           </a:p>
           <a:p>
             <a:pPr lvl="3"/>
@@ -3194,6 +3218,7 @@
               <a:rPr lang="zh-CN" altLang="en-US"/>
               <a:t>第四级</a:t>
             </a:r>
+            <a:endParaRPr lang="zh-CN" altLang="en-US"/>
           </a:p>
           <a:p>
             <a:pPr lvl="4"/>
@@ -3201,6 +3226,7 @@
               <a:rPr lang="zh-CN" altLang="en-US"/>
               <a:t>第五级</a:t>
             </a:r>
+            <a:endParaRPr lang="zh-CN" altLang="en-US"/>
           </a:p>
         </p:txBody>
       </p:sp>
@@ -3221,7 +3247,6 @@
           <a:p>
             <a:fld id="{D997B5FA-0921-464F-AAE1-844C04324D75}" type="datetimeFigureOut">
               <a:rPr lang="zh-CN" altLang="en-US" smtClean="0"/>
-              <a:t>2025/4/7</a:t>
             </a:fld>
             <a:endParaRPr lang="zh-CN" altLang="en-US"/>
           </a:p>
@@ -3263,7 +3288,6 @@
           <a:p>
             <a:fld id="{565CE74E-AB26-4998-AD42-012C4C1AD076}" type="slidenum">
               <a:rPr lang="zh-CN" altLang="en-US" smtClean="0"/>
-              <a:t>‹#›</a:t>
             </a:fld>
             <a:endParaRPr lang="zh-CN" altLang="en-US"/>
           </a:p>
@@ -3311,7 +3335,6 @@
           <a:p>
             <a:fld id="{D997B5FA-0921-464F-AAE1-844C04324D75}" type="datetimeFigureOut">
               <a:rPr lang="zh-CN" altLang="en-US" smtClean="0"/>
-              <a:t>2025/4/7</a:t>
             </a:fld>
             <a:endParaRPr lang="zh-CN" altLang="en-US"/>
           </a:p>
@@ -3353,7 +3376,6 @@
           <a:p>
             <a:fld id="{565CE74E-AB26-4998-AD42-012C4C1AD076}" type="slidenum">
               <a:rPr lang="zh-CN" altLang="en-US" smtClean="0"/>
-              <a:t>‹#›</a:t>
             </a:fld>
             <a:endParaRPr lang="zh-CN" altLang="en-US"/>
           </a:p>
@@ -3412,6 +3434,7 @@
               <a:rPr lang="zh-CN" altLang="en-US"/>
               <a:t>单击此处编辑母版标题样式</a:t>
             </a:r>
+            <a:endParaRPr lang="zh-CN" altLang="en-US"/>
           </a:p>
         </p:txBody>
       </p:sp>
@@ -3468,6 +3491,7 @@
               <a:rPr lang="zh-CN" altLang="en-US"/>
               <a:t>单击此处编辑母版文本样式</a:t>
             </a:r>
+            <a:endParaRPr lang="zh-CN" altLang="en-US"/>
           </a:p>
           <a:p>
             <a:pPr lvl="1"/>
@@ -3475,6 +3499,7 @@
               <a:rPr lang="zh-CN" altLang="en-US"/>
               <a:t>第二级</a:t>
             </a:r>
+            <a:endParaRPr lang="zh-CN" altLang="en-US"/>
           </a:p>
           <a:p>
             <a:pPr lvl="2"/>
@@ -3482,6 +3507,7 @@
               <a:rPr lang="zh-CN" altLang="en-US"/>
               <a:t>第三级</a:t>
             </a:r>
+            <a:endParaRPr lang="zh-CN" altLang="en-US"/>
           </a:p>
           <a:p>
             <a:pPr lvl="3"/>
@@ -3489,6 +3515,7 @@
               <a:rPr lang="zh-CN" altLang="en-US"/>
               <a:t>第四级</a:t>
             </a:r>
+            <a:endParaRPr lang="zh-CN" altLang="en-US"/>
           </a:p>
           <a:p>
             <a:pPr lvl="4"/>
@@ -3496,6 +3523,7 @@
               <a:rPr lang="zh-CN" altLang="en-US"/>
               <a:t>第五级</a:t>
             </a:r>
+            <a:endParaRPr lang="zh-CN" altLang="en-US"/>
           </a:p>
         </p:txBody>
       </p:sp>
@@ -3561,6 +3589,7 @@
               <a:rPr lang="zh-CN" altLang="en-US"/>
               <a:t>单击此处编辑母版文本样式</a:t>
             </a:r>
+            <a:endParaRPr lang="zh-CN" altLang="en-US"/>
           </a:p>
         </p:txBody>
       </p:sp>
@@ -3581,7 +3610,6 @@
           <a:p>
             <a:fld id="{D997B5FA-0921-464F-AAE1-844C04324D75}" type="datetimeFigureOut">
               <a:rPr lang="zh-CN" altLang="en-US" smtClean="0"/>
-              <a:t>2025/4/7</a:t>
             </a:fld>
             <a:endParaRPr lang="zh-CN" altLang="en-US"/>
           </a:p>
@@ -3623,7 +3651,6 @@
           <a:p>
             <a:fld id="{565CE74E-AB26-4998-AD42-012C4C1AD076}" type="slidenum">
               <a:rPr lang="zh-CN" altLang="en-US" smtClean="0"/>
-              <a:t>‹#›</a:t>
             </a:fld>
             <a:endParaRPr lang="zh-CN" altLang="en-US"/>
           </a:p>
@@ -3682,6 +3709,7 @@
               <a:rPr lang="zh-CN" altLang="en-US"/>
               <a:t>单击此处编辑母版标题样式</a:t>
             </a:r>
+            <a:endParaRPr lang="zh-CN" altLang="en-US"/>
           </a:p>
         </p:txBody>
       </p:sp>
@@ -3808,6 +3836,7 @@
               <a:rPr lang="zh-CN" altLang="en-US"/>
               <a:t>单击此处编辑母版文本样式</a:t>
             </a:r>
+            <a:endParaRPr lang="zh-CN" altLang="en-US"/>
           </a:p>
         </p:txBody>
       </p:sp>
@@ -3828,7 +3857,6 @@
           <a:p>
             <a:fld id="{D997B5FA-0921-464F-AAE1-844C04324D75}" type="datetimeFigureOut">
               <a:rPr lang="zh-CN" altLang="en-US" smtClean="0"/>
-              <a:t>2025/4/7</a:t>
             </a:fld>
             <a:endParaRPr lang="zh-CN" altLang="en-US"/>
           </a:p>
@@ -3870,7 +3898,6 @@
           <a:p>
             <a:fld id="{565CE74E-AB26-4998-AD42-012C4C1AD076}" type="slidenum">
               <a:rPr lang="zh-CN" altLang="en-US" smtClean="0"/>
-              <a:t>‹#›</a:t>
             </a:fld>
             <a:endParaRPr lang="zh-CN" altLang="en-US"/>
           </a:p>
@@ -3920,6 +3947,7 @@
               <a:rPr lang="zh-CN" altLang="en-US"/>
               <a:t>单击此处编辑母版标题样式</a:t>
             </a:r>
+            <a:endParaRPr lang="zh-CN" altLang="en-US"/>
           </a:p>
         </p:txBody>
       </p:sp>
@@ -3943,6 +3971,7 @@
               <a:rPr lang="zh-CN" altLang="en-US"/>
               <a:t>单击此处编辑母版文本样式</a:t>
             </a:r>
+            <a:endParaRPr lang="zh-CN" altLang="en-US"/>
           </a:p>
           <a:p>
             <a:pPr lvl="1"/>
@@ -3950,6 +3979,7 @@
               <a:rPr lang="zh-CN" altLang="en-US"/>
               <a:t>第二级</a:t>
             </a:r>
+            <a:endParaRPr lang="zh-CN" altLang="en-US"/>
           </a:p>
           <a:p>
             <a:pPr lvl="2"/>
@@ -3957,6 +3987,7 @@
               <a:rPr lang="zh-CN" altLang="en-US"/>
               <a:t>第三级</a:t>
             </a:r>
+            <a:endParaRPr lang="zh-CN" altLang="en-US"/>
           </a:p>
           <a:p>
             <a:pPr lvl="3"/>
@@ -3964,6 +3995,7 @@
               <a:rPr lang="zh-CN" altLang="en-US"/>
               <a:t>第四级</a:t>
             </a:r>
+            <a:endParaRPr lang="zh-CN" altLang="en-US"/>
           </a:p>
           <a:p>
             <a:pPr lvl="4"/>
@@ -3971,6 +4003,7 @@
               <a:rPr lang="zh-CN" altLang="en-US"/>
               <a:t>第五级</a:t>
             </a:r>
+            <a:endParaRPr lang="zh-CN" altLang="en-US"/>
           </a:p>
         </p:txBody>
       </p:sp>
@@ -3991,7 +4024,6 @@
           <a:p>
             <a:fld id="{D997B5FA-0921-464F-AAE1-844C04324D75}" type="datetimeFigureOut">
               <a:rPr lang="zh-CN" altLang="en-US" smtClean="0"/>
-              <a:t>2025/4/7</a:t>
             </a:fld>
             <a:endParaRPr lang="zh-CN" altLang="en-US"/>
           </a:p>
@@ -4033,7 +4065,6 @@
           <a:p>
             <a:fld id="{565CE74E-AB26-4998-AD42-012C4C1AD076}" type="slidenum">
               <a:rPr lang="zh-CN" altLang="en-US" smtClean="0"/>
-              <a:t>‹#›</a:t>
             </a:fld>
             <a:endParaRPr lang="zh-CN" altLang="en-US"/>
           </a:p>
@@ -4088,6 +4119,7 @@
               <a:rPr lang="zh-CN" altLang="en-US"/>
               <a:t>单击此处编辑母版标题样式</a:t>
             </a:r>
+            <a:endParaRPr lang="zh-CN" altLang="en-US"/>
           </a:p>
         </p:txBody>
       </p:sp>
@@ -4116,6 +4148,7 @@
               <a:rPr lang="zh-CN" altLang="en-US"/>
               <a:t>单击此处编辑母版文本样式</a:t>
             </a:r>
+            <a:endParaRPr lang="zh-CN" altLang="en-US"/>
           </a:p>
           <a:p>
             <a:pPr lvl="1"/>
@@ -4123,6 +4156,7 @@
               <a:rPr lang="zh-CN" altLang="en-US"/>
               <a:t>第二级</a:t>
             </a:r>
+            <a:endParaRPr lang="zh-CN" altLang="en-US"/>
           </a:p>
           <a:p>
             <a:pPr lvl="2"/>
@@ -4130,6 +4164,7 @@
               <a:rPr lang="zh-CN" altLang="en-US"/>
               <a:t>第三级</a:t>
             </a:r>
+            <a:endParaRPr lang="zh-CN" altLang="en-US"/>
           </a:p>
           <a:p>
             <a:pPr lvl="3"/>
@@ -4137,6 +4172,7 @@
               <a:rPr lang="zh-CN" altLang="en-US"/>
               <a:t>第四级</a:t>
             </a:r>
+            <a:endParaRPr lang="zh-CN" altLang="en-US"/>
           </a:p>
           <a:p>
             <a:pPr lvl="4"/>
@@ -4144,6 +4180,7 @@
               <a:rPr lang="zh-CN" altLang="en-US"/>
               <a:t>第五级</a:t>
             </a:r>
+            <a:endParaRPr lang="zh-CN" altLang="en-US"/>
           </a:p>
         </p:txBody>
       </p:sp>
@@ -4164,7 +4201,6 @@
           <a:p>
             <a:fld id="{D997B5FA-0921-464F-AAE1-844C04324D75}" type="datetimeFigureOut">
               <a:rPr lang="zh-CN" altLang="en-US" smtClean="0"/>
-              <a:t>2025/4/7</a:t>
             </a:fld>
             <a:endParaRPr lang="zh-CN" altLang="en-US"/>
           </a:p>
@@ -4206,7 +4242,6 @@
           <a:p>
             <a:fld id="{565CE74E-AB26-4998-AD42-012C4C1AD076}" type="slidenum">
               <a:rPr lang="zh-CN" altLang="en-US" smtClean="0"/>
-              <a:t>‹#›</a:t>
             </a:fld>
             <a:endParaRPr lang="zh-CN" altLang="en-US"/>
           </a:p>
@@ -4391,6 +4426,7 @@
               <a:rPr lang="zh-CN" altLang="en-US"/>
               <a:t>单击此处编辑母版标题样式</a:t>
             </a:r>
+            <a:endParaRPr lang="zh-CN" altLang="en-US"/>
           </a:p>
         </p:txBody>
       </p:sp>
@@ -4455,6 +4491,7 @@
               <a:rPr lang="zh-CN" altLang="en-US"/>
               <a:t>单击此处编辑母版副标题样式</a:t>
             </a:r>
+            <a:endParaRPr lang="zh-CN" altLang="en-US"/>
           </a:p>
         </p:txBody>
       </p:sp>
@@ -4475,7 +4512,6 @@
           <a:p>
             <a:fld id="{D997B5FA-0921-464F-AAE1-844C04324D75}" type="datetimeFigureOut">
               <a:rPr lang="zh-CN" altLang="en-US" smtClean="0"/>
-              <a:t>2025/4/7</a:t>
             </a:fld>
             <a:endParaRPr lang="zh-CN" altLang="en-US"/>
           </a:p>
@@ -4517,7 +4553,6 @@
           <a:p>
             <a:fld id="{565CE74E-AB26-4998-AD42-012C4C1AD076}" type="slidenum">
               <a:rPr lang="zh-CN" altLang="en-US" smtClean="0"/>
-              <a:t>‹#›</a:t>
             </a:fld>
             <a:endParaRPr lang="zh-CN" altLang="en-US"/>
           </a:p>
@@ -4567,6 +4602,7 @@
               <a:rPr lang="zh-CN" altLang="en-US"/>
               <a:t>单击此处编辑母版标题样式</a:t>
             </a:r>
+            <a:endParaRPr lang="zh-CN" altLang="en-US"/>
           </a:p>
         </p:txBody>
       </p:sp>
@@ -4590,6 +4626,7 @@
               <a:rPr lang="zh-CN" altLang="en-US"/>
               <a:t>单击此处编辑母版文本样式</a:t>
             </a:r>
+            <a:endParaRPr lang="zh-CN" altLang="en-US"/>
           </a:p>
           <a:p>
             <a:pPr lvl="1"/>
@@ -4597,6 +4634,7 @@
               <a:rPr lang="zh-CN" altLang="en-US"/>
               <a:t>第二级</a:t>
             </a:r>
+            <a:endParaRPr lang="zh-CN" altLang="en-US"/>
           </a:p>
           <a:p>
             <a:pPr lvl="2"/>
@@ -4604,6 +4642,7 @@
               <a:rPr lang="zh-CN" altLang="en-US"/>
               <a:t>第三级</a:t>
             </a:r>
+            <a:endParaRPr lang="zh-CN" altLang="en-US"/>
           </a:p>
           <a:p>
             <a:pPr lvl="3"/>
@@ -4611,6 +4650,7 @@
               <a:rPr lang="zh-CN" altLang="en-US"/>
               <a:t>第四级</a:t>
             </a:r>
+            <a:endParaRPr lang="zh-CN" altLang="en-US"/>
           </a:p>
           <a:p>
             <a:pPr lvl="4"/>
@@ -4618,6 +4658,7 @@
               <a:rPr lang="zh-CN" altLang="en-US"/>
               <a:t>第五级</a:t>
             </a:r>
+            <a:endParaRPr lang="zh-CN" altLang="en-US"/>
           </a:p>
         </p:txBody>
       </p:sp>
@@ -4638,7 +4679,6 @@
           <a:p>
             <a:fld id="{D997B5FA-0921-464F-AAE1-844C04324D75}" type="datetimeFigureOut">
               <a:rPr lang="zh-CN" altLang="en-US" smtClean="0"/>
-              <a:t>2025/4/7</a:t>
             </a:fld>
             <a:endParaRPr lang="zh-CN" altLang="en-US"/>
           </a:p>
@@ -4680,7 +4720,6 @@
           <a:p>
             <a:fld id="{565CE74E-AB26-4998-AD42-012C4C1AD076}" type="slidenum">
               <a:rPr lang="zh-CN" altLang="en-US" smtClean="0"/>
-              <a:t>‹#›</a:t>
             </a:fld>
             <a:endParaRPr lang="zh-CN" altLang="en-US"/>
           </a:p>
@@ -4739,6 +4778,7 @@
               <a:rPr lang="zh-CN" altLang="en-US"/>
               <a:t>单击此处编辑母版标题样式</a:t>
             </a:r>
+            <a:endParaRPr lang="zh-CN" altLang="en-US"/>
           </a:p>
         </p:txBody>
       </p:sp>
@@ -4858,6 +4898,7 @@
               <a:rPr lang="zh-CN" altLang="en-US"/>
               <a:t>单击此处编辑母版文本样式</a:t>
             </a:r>
+            <a:endParaRPr lang="zh-CN" altLang="en-US"/>
           </a:p>
         </p:txBody>
       </p:sp>
@@ -4878,7 +4919,6 @@
           <a:p>
             <a:fld id="{D997B5FA-0921-464F-AAE1-844C04324D75}" type="datetimeFigureOut">
               <a:rPr lang="zh-CN" altLang="en-US" smtClean="0"/>
-              <a:t>2025/4/7</a:t>
             </a:fld>
             <a:endParaRPr lang="zh-CN" altLang="en-US"/>
           </a:p>
@@ -4920,7 +4960,6 @@
           <a:p>
             <a:fld id="{565CE74E-AB26-4998-AD42-012C4C1AD076}" type="slidenum">
               <a:rPr lang="zh-CN" altLang="en-US" smtClean="0"/>
-              <a:t>‹#›</a:t>
             </a:fld>
             <a:endParaRPr lang="zh-CN" altLang="en-US"/>
           </a:p>
@@ -4979,6 +5018,7 @@
               <a:rPr lang="zh-CN" altLang="en-US"/>
               <a:t>单击此处编辑母版标题样式</a:t>
             </a:r>
+            <a:endParaRPr lang="zh-CN" altLang="en-US"/>
           </a:p>
         </p:txBody>
       </p:sp>
@@ -5098,6 +5138,7 @@
               <a:rPr lang="zh-CN" altLang="en-US"/>
               <a:t>单击此处编辑母版文本样式</a:t>
             </a:r>
+            <a:endParaRPr lang="zh-CN" altLang="en-US"/>
           </a:p>
         </p:txBody>
       </p:sp>
@@ -5118,7 +5159,6 @@
           <a:p>
             <a:fld id="{D997B5FA-0921-464F-AAE1-844C04324D75}" type="datetimeFigureOut">
               <a:rPr lang="zh-CN" altLang="en-US" smtClean="0"/>
-              <a:t>2025/4/7</a:t>
             </a:fld>
             <a:endParaRPr lang="zh-CN" altLang="en-US"/>
           </a:p>
@@ -5160,7 +5200,6 @@
           <a:p>
             <a:fld id="{565CE74E-AB26-4998-AD42-012C4C1AD076}" type="slidenum">
               <a:rPr lang="zh-CN" altLang="en-US" smtClean="0"/>
-              <a:t>‹#›</a:t>
             </a:fld>
             <a:endParaRPr lang="zh-CN" altLang="en-US"/>
           </a:p>
@@ -5210,6 +5249,7 @@
               <a:rPr lang="zh-CN" altLang="en-US"/>
               <a:t>单击此处编辑母版标题样式</a:t>
             </a:r>
+            <a:endParaRPr lang="zh-CN" altLang="en-US"/>
           </a:p>
         </p:txBody>
       </p:sp>
@@ -5238,6 +5278,7 @@
               <a:rPr lang="zh-CN" altLang="en-US"/>
               <a:t>单击此处编辑母版文本样式</a:t>
             </a:r>
+            <a:endParaRPr lang="zh-CN" altLang="en-US"/>
           </a:p>
           <a:p>
             <a:pPr lvl="1"/>
@@ -5245,6 +5286,7 @@
               <a:rPr lang="zh-CN" altLang="en-US"/>
               <a:t>第二级</a:t>
             </a:r>
+            <a:endParaRPr lang="zh-CN" altLang="en-US"/>
           </a:p>
           <a:p>
             <a:pPr lvl="2"/>
@@ -5252,6 +5294,7 @@
               <a:rPr lang="zh-CN" altLang="en-US"/>
               <a:t>第三级</a:t>
             </a:r>
+            <a:endParaRPr lang="zh-CN" altLang="en-US"/>
           </a:p>
           <a:p>
             <a:pPr lvl="3"/>
@@ -5259,6 +5302,7 @@
               <a:rPr lang="zh-CN" altLang="en-US"/>
               <a:t>第四级</a:t>
             </a:r>
+            <a:endParaRPr lang="zh-CN" altLang="en-US"/>
           </a:p>
           <a:p>
             <a:pPr lvl="4"/>
@@ -5266,6 +5310,7 @@
               <a:rPr lang="zh-CN" altLang="en-US"/>
               <a:t>第五级</a:t>
             </a:r>
+            <a:endParaRPr lang="zh-CN" altLang="en-US"/>
           </a:p>
         </p:txBody>
       </p:sp>
@@ -5294,6 +5339,7 @@
               <a:rPr lang="zh-CN" altLang="en-US"/>
               <a:t>单击此处编辑母版文本样式</a:t>
             </a:r>
+            <a:endParaRPr lang="zh-CN" altLang="en-US"/>
           </a:p>
           <a:p>
             <a:pPr lvl="1"/>
@@ -5301,6 +5347,7 @@
               <a:rPr lang="zh-CN" altLang="en-US"/>
               <a:t>第二级</a:t>
             </a:r>
+            <a:endParaRPr lang="zh-CN" altLang="en-US"/>
           </a:p>
           <a:p>
             <a:pPr lvl="2"/>
@@ -5308,6 +5355,7 @@
               <a:rPr lang="zh-CN" altLang="en-US"/>
               <a:t>第三级</a:t>
             </a:r>
+            <a:endParaRPr lang="zh-CN" altLang="en-US"/>
           </a:p>
           <a:p>
             <a:pPr lvl="3"/>
@@ -5315,6 +5363,7 @@
               <a:rPr lang="zh-CN" altLang="en-US"/>
               <a:t>第四级</a:t>
             </a:r>
+            <a:endParaRPr lang="zh-CN" altLang="en-US"/>
           </a:p>
           <a:p>
             <a:pPr lvl="4"/>
@@ -5322,6 +5371,7 @@
               <a:rPr lang="zh-CN" altLang="en-US"/>
               <a:t>第五级</a:t>
             </a:r>
+            <a:endParaRPr lang="zh-CN" altLang="en-US"/>
           </a:p>
         </p:txBody>
       </p:sp>
@@ -5342,7 +5392,6 @@
           <a:p>
             <a:fld id="{D997B5FA-0921-464F-AAE1-844C04324D75}" type="datetimeFigureOut">
               <a:rPr lang="zh-CN" altLang="en-US" smtClean="0"/>
-              <a:t>2025/4/7</a:t>
             </a:fld>
             <a:endParaRPr lang="zh-CN" altLang="en-US"/>
           </a:p>
@@ -5384,7 +5433,6 @@
           <a:p>
             <a:fld id="{565CE74E-AB26-4998-AD42-012C4C1AD076}" type="slidenum">
               <a:rPr lang="zh-CN" altLang="en-US" smtClean="0"/>
-              <a:t>‹#›</a:t>
             </a:fld>
             <a:endParaRPr lang="zh-CN" altLang="en-US"/>
           </a:p>
@@ -5439,6 +5487,7 @@
               <a:rPr lang="zh-CN" altLang="en-US"/>
               <a:t>单击此处编辑母版标题样式</a:t>
             </a:r>
+            <a:endParaRPr lang="zh-CN" altLang="en-US"/>
           </a:p>
         </p:txBody>
       </p:sp>
@@ -5504,6 +5553,7 @@
               <a:rPr lang="zh-CN" altLang="en-US"/>
               <a:t>单击此处编辑母版文本样式</a:t>
             </a:r>
+            <a:endParaRPr lang="zh-CN" altLang="en-US"/>
           </a:p>
         </p:txBody>
       </p:sp>
@@ -5532,6 +5582,7 @@
               <a:rPr lang="zh-CN" altLang="en-US"/>
               <a:t>单击此处编辑母版文本样式</a:t>
             </a:r>
+            <a:endParaRPr lang="zh-CN" altLang="en-US"/>
           </a:p>
           <a:p>
             <a:pPr lvl="1"/>
@@ -5539,6 +5590,7 @@
               <a:rPr lang="zh-CN" altLang="en-US"/>
               <a:t>第二级</a:t>
             </a:r>
+            <a:endParaRPr lang="zh-CN" altLang="en-US"/>
           </a:p>
           <a:p>
             <a:pPr lvl="2"/>
@@ -5546,6 +5598,7 @@
               <a:rPr lang="zh-CN" altLang="en-US"/>
               <a:t>第三级</a:t>
             </a:r>
+            <a:endParaRPr lang="zh-CN" altLang="en-US"/>
           </a:p>
           <a:p>
             <a:pPr lvl="3"/>
@@ -5553,6 +5606,7 @@
               <a:rPr lang="zh-CN" altLang="en-US"/>
               <a:t>第四级</a:t>
             </a:r>
+            <a:endParaRPr lang="zh-CN" altLang="en-US"/>
           </a:p>
           <a:p>
             <a:pPr lvl="4"/>
@@ -5560,6 +5614,7 @@
               <a:rPr lang="zh-CN" altLang="en-US"/>
               <a:t>第五级</a:t>
             </a:r>
+            <a:endParaRPr lang="zh-CN" altLang="en-US"/>
           </a:p>
         </p:txBody>
       </p:sp>
@@ -5625,6 +5680,7 @@
               <a:rPr lang="zh-CN" altLang="en-US"/>
               <a:t>单击此处编辑母版文本样式</a:t>
             </a:r>
+            <a:endParaRPr lang="zh-CN" altLang="en-US"/>
           </a:p>
         </p:txBody>
       </p:sp>
@@ -5653,6 +5709,7 @@
               <a:rPr lang="zh-CN" altLang="en-US"/>
               <a:t>单击此处编辑母版文本样式</a:t>
             </a:r>
+            <a:endParaRPr lang="zh-CN" altLang="en-US"/>
           </a:p>
           <a:p>
             <a:pPr lvl="1"/>
@@ -5660,6 +5717,7 @@
               <a:rPr lang="zh-CN" altLang="en-US"/>
               <a:t>第二级</a:t>
             </a:r>
+            <a:endParaRPr lang="zh-CN" altLang="en-US"/>
           </a:p>
           <a:p>
             <a:pPr lvl="2"/>
@@ -5667,6 +5725,7 @@
               <a:rPr lang="zh-CN" altLang="en-US"/>
               <a:t>第三级</a:t>
             </a:r>
+            <a:endParaRPr lang="zh-CN" altLang="en-US"/>
           </a:p>
           <a:p>
             <a:pPr lvl="3"/>
@@ -5674,6 +5733,7 @@
               <a:rPr lang="zh-CN" altLang="en-US"/>
               <a:t>第四级</a:t>
             </a:r>
+            <a:endParaRPr lang="zh-CN" altLang="en-US"/>
           </a:p>
           <a:p>
             <a:pPr lvl="4"/>
@@ -5681,6 +5741,7 @@
               <a:rPr lang="zh-CN" altLang="en-US"/>
               <a:t>第五级</a:t>
             </a:r>
+            <a:endParaRPr lang="zh-CN" altLang="en-US"/>
           </a:p>
         </p:txBody>
       </p:sp>
@@ -5701,7 +5762,6 @@
           <a:p>
             <a:fld id="{D997B5FA-0921-464F-AAE1-844C04324D75}" type="datetimeFigureOut">
               <a:rPr lang="zh-CN" altLang="en-US" smtClean="0"/>
-              <a:t>2025/4/7</a:t>
             </a:fld>
             <a:endParaRPr lang="zh-CN" altLang="en-US"/>
           </a:p>
@@ -5743,7 +5803,6 @@
           <a:p>
             <a:fld id="{565CE74E-AB26-4998-AD42-012C4C1AD076}" type="slidenum">
               <a:rPr lang="zh-CN" altLang="en-US" smtClean="0"/>
-              <a:t>‹#›</a:t>
             </a:fld>
             <a:endParaRPr lang="zh-CN" altLang="en-US"/>
           </a:p>
@@ -5793,6 +5852,7 @@
               <a:rPr lang="zh-CN" altLang="en-US"/>
               <a:t>单击此处编辑母版标题样式</a:t>
             </a:r>
+            <a:endParaRPr lang="zh-CN" altLang="en-US"/>
           </a:p>
         </p:txBody>
       </p:sp>
@@ -5813,7 +5873,6 @@
           <a:p>
             <a:fld id="{D997B5FA-0921-464F-AAE1-844C04324D75}" type="datetimeFigureOut">
               <a:rPr lang="zh-CN" altLang="en-US" smtClean="0"/>
-              <a:t>2025/4/7</a:t>
             </a:fld>
             <a:endParaRPr lang="zh-CN" altLang="en-US"/>
           </a:p>
@@ -5855,7 +5914,6 @@
           <a:p>
             <a:fld id="{565CE74E-AB26-4998-AD42-012C4C1AD076}" type="slidenum">
               <a:rPr lang="zh-CN" altLang="en-US" smtClean="0"/>
-              <a:t>‹#›</a:t>
             </a:fld>
             <a:endParaRPr lang="zh-CN" altLang="en-US"/>
           </a:p>
@@ -5903,7 +5961,6 @@
           <a:p>
             <a:fld id="{D997B5FA-0921-464F-AAE1-844C04324D75}" type="datetimeFigureOut">
               <a:rPr lang="zh-CN" altLang="en-US" smtClean="0"/>
-              <a:t>2025/4/7</a:t>
             </a:fld>
             <a:endParaRPr lang="zh-CN" altLang="en-US"/>
           </a:p>
@@ -5945,7 +6002,6 @@
           <a:p>
             <a:fld id="{565CE74E-AB26-4998-AD42-012C4C1AD076}" type="slidenum">
               <a:rPr lang="zh-CN" altLang="en-US" smtClean="0"/>
-              <a:t>‹#›</a:t>
             </a:fld>
             <a:endParaRPr lang="zh-CN" altLang="en-US"/>
           </a:p>
@@ -6004,6 +6060,7 @@
               <a:rPr lang="zh-CN" altLang="en-US"/>
               <a:t>单击此处编辑母版标题样式</a:t>
             </a:r>
+            <a:endParaRPr lang="zh-CN" altLang="en-US"/>
           </a:p>
         </p:txBody>
       </p:sp>
@@ -6060,6 +6117,7 @@
               <a:rPr lang="zh-CN" altLang="en-US"/>
               <a:t>单击此处编辑母版文本样式</a:t>
             </a:r>
+            <a:endParaRPr lang="zh-CN" altLang="en-US"/>
           </a:p>
           <a:p>
             <a:pPr lvl="1"/>
@@ -6067,6 +6125,7 @@
               <a:rPr lang="zh-CN" altLang="en-US"/>
               <a:t>第二级</a:t>
             </a:r>
+            <a:endParaRPr lang="zh-CN" altLang="en-US"/>
           </a:p>
           <a:p>
             <a:pPr lvl="2"/>
@@ -6074,6 +6133,7 @@
               <a:rPr lang="zh-CN" altLang="en-US"/>
               <a:t>第三级</a:t>
             </a:r>
+            <a:endParaRPr lang="zh-CN" altLang="en-US"/>
           </a:p>
           <a:p>
             <a:pPr lvl="3"/>
@@ -6081,6 +6141,7 @@
               <a:rPr lang="zh-CN" altLang="en-US"/>
               <a:t>第四级</a:t>
             </a:r>
+            <a:endParaRPr lang="zh-CN" altLang="en-US"/>
           </a:p>
           <a:p>
             <a:pPr lvl="4"/>
@@ -6088,6 +6149,7 @@
               <a:rPr lang="zh-CN" altLang="en-US"/>
               <a:t>第五级</a:t>
             </a:r>
+            <a:endParaRPr lang="zh-CN" altLang="en-US"/>
           </a:p>
         </p:txBody>
       </p:sp>
@@ -6153,6 +6215,7 @@
               <a:rPr lang="zh-CN" altLang="en-US"/>
               <a:t>单击此处编辑母版文本样式</a:t>
             </a:r>
+            <a:endParaRPr lang="zh-CN" altLang="en-US"/>
           </a:p>
         </p:txBody>
       </p:sp>
@@ -6173,7 +6236,6 @@
           <a:p>
             <a:fld id="{D997B5FA-0921-464F-AAE1-844C04324D75}" type="datetimeFigureOut">
               <a:rPr lang="zh-CN" altLang="en-US" smtClean="0"/>
-              <a:t>2025/4/7</a:t>
             </a:fld>
             <a:endParaRPr lang="zh-CN" altLang="en-US"/>
           </a:p>
@@ -6215,7 +6277,6 @@
           <a:p>
             <a:fld id="{565CE74E-AB26-4998-AD42-012C4C1AD076}" type="slidenum">
               <a:rPr lang="zh-CN" altLang="en-US" smtClean="0"/>
-              <a:t>‹#›</a:t>
             </a:fld>
             <a:endParaRPr lang="zh-CN" altLang="en-US"/>
           </a:p>
@@ -6274,6 +6335,7 @@
               <a:rPr lang="zh-CN" altLang="en-US"/>
               <a:t>单击此处编辑母版标题样式</a:t>
             </a:r>
+            <a:endParaRPr lang="zh-CN" altLang="en-US"/>
           </a:p>
         </p:txBody>
       </p:sp>
@@ -6400,6 +6462,7 @@
               <a:rPr lang="zh-CN" altLang="en-US"/>
               <a:t>单击此处编辑母版文本样式</a:t>
             </a:r>
+            <a:endParaRPr lang="zh-CN" altLang="en-US"/>
           </a:p>
         </p:txBody>
       </p:sp>
@@ -6420,7 +6483,6 @@
           <a:p>
             <a:fld id="{D997B5FA-0921-464F-AAE1-844C04324D75}" type="datetimeFigureOut">
               <a:rPr lang="zh-CN" altLang="en-US" smtClean="0"/>
-              <a:t>2025/4/7</a:t>
             </a:fld>
             <a:endParaRPr lang="zh-CN" altLang="en-US"/>
           </a:p>
@@ -6462,7 +6524,6 @@
           <a:p>
             <a:fld id="{565CE74E-AB26-4998-AD42-012C4C1AD076}" type="slidenum">
               <a:rPr lang="zh-CN" altLang="en-US" smtClean="0"/>
-              <a:t>‹#›</a:t>
             </a:fld>
             <a:endParaRPr lang="zh-CN" altLang="en-US"/>
           </a:p>
@@ -6512,6 +6573,7 @@
               <a:rPr lang="zh-CN" altLang="en-US"/>
               <a:t>单击此处编辑母版标题样式</a:t>
             </a:r>
+            <a:endParaRPr lang="zh-CN" altLang="en-US"/>
           </a:p>
         </p:txBody>
       </p:sp>
@@ -6535,6 +6597,7 @@
               <a:rPr lang="zh-CN" altLang="en-US"/>
               <a:t>单击此处编辑母版文本样式</a:t>
             </a:r>
+            <a:endParaRPr lang="zh-CN" altLang="en-US"/>
           </a:p>
           <a:p>
             <a:pPr lvl="1"/>
@@ -6542,6 +6605,7 @@
               <a:rPr lang="zh-CN" altLang="en-US"/>
               <a:t>第二级</a:t>
             </a:r>
+            <a:endParaRPr lang="zh-CN" altLang="en-US"/>
           </a:p>
           <a:p>
             <a:pPr lvl="2"/>
@@ -6549,6 +6613,7 @@
               <a:rPr lang="zh-CN" altLang="en-US"/>
               <a:t>第三级</a:t>
             </a:r>
+            <a:endParaRPr lang="zh-CN" altLang="en-US"/>
           </a:p>
           <a:p>
             <a:pPr lvl="3"/>
@@ -6556,6 +6621,7 @@
               <a:rPr lang="zh-CN" altLang="en-US"/>
               <a:t>第四级</a:t>
             </a:r>
+            <a:endParaRPr lang="zh-CN" altLang="en-US"/>
           </a:p>
           <a:p>
             <a:pPr lvl="4"/>
@@ -6563,6 +6629,7 @@
               <a:rPr lang="zh-CN" altLang="en-US"/>
               <a:t>第五级</a:t>
             </a:r>
+            <a:endParaRPr lang="zh-CN" altLang="en-US"/>
           </a:p>
         </p:txBody>
       </p:sp>
@@ -6583,7 +6650,6 @@
           <a:p>
             <a:fld id="{D997B5FA-0921-464F-AAE1-844C04324D75}" type="datetimeFigureOut">
               <a:rPr lang="zh-CN" altLang="en-US" smtClean="0"/>
-              <a:t>2025/4/7</a:t>
             </a:fld>
             <a:endParaRPr lang="zh-CN" altLang="en-US"/>
           </a:p>
@@ -6625,7 +6691,6 @@
           <a:p>
             <a:fld id="{565CE74E-AB26-4998-AD42-012C4C1AD076}" type="slidenum">
               <a:rPr lang="zh-CN" altLang="en-US" smtClean="0"/>
-              <a:t>‹#›</a:t>
             </a:fld>
             <a:endParaRPr lang="zh-CN" altLang="en-US"/>
           </a:p>
@@ -6680,6 +6745,7 @@
               <a:rPr lang="zh-CN" altLang="en-US"/>
               <a:t>单击此处编辑母版标题样式</a:t>
             </a:r>
+            <a:endParaRPr lang="zh-CN" altLang="en-US"/>
           </a:p>
         </p:txBody>
       </p:sp>
@@ -6708,6 +6774,7 @@
               <a:rPr lang="zh-CN" altLang="en-US"/>
               <a:t>单击此处编辑母版文本样式</a:t>
             </a:r>
+            <a:endParaRPr lang="zh-CN" altLang="en-US"/>
           </a:p>
           <a:p>
             <a:pPr lvl="1"/>
@@ -6715,6 +6782,7 @@
               <a:rPr lang="zh-CN" altLang="en-US"/>
               <a:t>第二级</a:t>
             </a:r>
+            <a:endParaRPr lang="zh-CN" altLang="en-US"/>
           </a:p>
           <a:p>
             <a:pPr lvl="2"/>
@@ -6722,6 +6790,7 @@
               <a:rPr lang="zh-CN" altLang="en-US"/>
               <a:t>第三级</a:t>
             </a:r>
+            <a:endParaRPr lang="zh-CN" altLang="en-US"/>
           </a:p>
           <a:p>
             <a:pPr lvl="3"/>
@@ -6729,6 +6798,7 @@
               <a:rPr lang="zh-CN" altLang="en-US"/>
               <a:t>第四级</a:t>
             </a:r>
+            <a:endParaRPr lang="zh-CN" altLang="en-US"/>
           </a:p>
           <a:p>
             <a:pPr lvl="4"/>
@@ -6736,6 +6806,7 @@
               <a:rPr lang="zh-CN" altLang="en-US"/>
               <a:t>第五级</a:t>
             </a:r>
+            <a:endParaRPr lang="zh-CN" altLang="en-US"/>
           </a:p>
         </p:txBody>
       </p:sp>
@@ -6756,7 +6827,6 @@
           <a:p>
             <a:fld id="{D997B5FA-0921-464F-AAE1-844C04324D75}" type="datetimeFigureOut">
               <a:rPr lang="zh-CN" altLang="en-US" smtClean="0"/>
-              <a:t>2025/4/7</a:t>
             </a:fld>
             <a:endParaRPr lang="zh-CN" altLang="en-US"/>
           </a:p>
@@ -6798,7 +6868,6 @@
           <a:p>
             <a:fld id="{565CE74E-AB26-4998-AD42-012C4C1AD076}" type="slidenum">
               <a:rPr lang="zh-CN" altLang="en-US" smtClean="0"/>
-              <a:t>‹#›</a:t>
             </a:fld>
             <a:endParaRPr lang="zh-CN" altLang="en-US"/>
           </a:p>
@@ -6974,6 +7043,7 @@
               <a:rPr lang="zh-CN" altLang="en-US"/>
               <a:t>单击此处编辑母版标题样式</a:t>
             </a:r>
+            <a:endParaRPr lang="zh-CN" altLang="en-US"/>
           </a:p>
         </p:txBody>
       </p:sp>
@@ -7002,6 +7072,7 @@
               <a:rPr lang="zh-CN" altLang="en-US"/>
               <a:t>单击此处编辑母版文本样式</a:t>
             </a:r>
+            <a:endParaRPr lang="zh-CN" altLang="en-US"/>
           </a:p>
           <a:p>
             <a:pPr lvl="1"/>
@@ -7009,6 +7080,7 @@
               <a:rPr lang="zh-CN" altLang="en-US"/>
               <a:t>第二级</a:t>
             </a:r>
+            <a:endParaRPr lang="zh-CN" altLang="en-US"/>
           </a:p>
           <a:p>
             <a:pPr lvl="2"/>
@@ -7016,6 +7088,7 @@
               <a:rPr lang="zh-CN" altLang="en-US"/>
               <a:t>第三级</a:t>
             </a:r>
+            <a:endParaRPr lang="zh-CN" altLang="en-US"/>
           </a:p>
           <a:p>
             <a:pPr lvl="3"/>
@@ -7023,6 +7096,7 @@
               <a:rPr lang="zh-CN" altLang="en-US"/>
               <a:t>第四级</a:t>
             </a:r>
+            <a:endParaRPr lang="zh-CN" altLang="en-US"/>
           </a:p>
           <a:p>
             <a:pPr lvl="4"/>
@@ -7030,6 +7104,7 @@
               <a:rPr lang="zh-CN" altLang="en-US"/>
               <a:t>第五级</a:t>
             </a:r>
+            <a:endParaRPr lang="zh-CN" altLang="en-US"/>
           </a:p>
         </p:txBody>
       </p:sp>
@@ -7058,6 +7133,7 @@
               <a:rPr lang="zh-CN" altLang="en-US"/>
               <a:t>单击此处编辑母版文本样式</a:t>
             </a:r>
+            <a:endParaRPr lang="zh-CN" altLang="en-US"/>
           </a:p>
           <a:p>
             <a:pPr lvl="1"/>
@@ -7065,6 +7141,7 @@
               <a:rPr lang="zh-CN" altLang="en-US"/>
               <a:t>第二级</a:t>
             </a:r>
+            <a:endParaRPr lang="zh-CN" altLang="en-US"/>
           </a:p>
           <a:p>
             <a:pPr lvl="2"/>
@@ -7072,6 +7149,7 @@
               <a:rPr lang="zh-CN" altLang="en-US"/>
               <a:t>第三级</a:t>
             </a:r>
+            <a:endParaRPr lang="zh-CN" altLang="en-US"/>
           </a:p>
           <a:p>
             <a:pPr lvl="3"/>
@@ -7079,6 +7157,7 @@
               <a:rPr lang="zh-CN" altLang="en-US"/>
               <a:t>第四级</a:t>
             </a:r>
+            <a:endParaRPr lang="zh-CN" altLang="en-US"/>
           </a:p>
           <a:p>
             <a:pPr lvl="4"/>
@@ -7086,6 +7165,7 @@
               <a:rPr lang="zh-CN" altLang="en-US"/>
               <a:t>第五级</a:t>
             </a:r>
+            <a:endParaRPr lang="zh-CN" altLang="en-US"/>
           </a:p>
         </p:txBody>
       </p:sp>
@@ -7106,7 +7186,6 @@
           <a:p>
             <a:fld id="{D997B5FA-0921-464F-AAE1-844C04324D75}" type="datetimeFigureOut">
               <a:rPr lang="zh-CN" altLang="en-US" smtClean="0"/>
-              <a:t>2025/4/7</a:t>
             </a:fld>
             <a:endParaRPr lang="zh-CN" altLang="en-US"/>
           </a:p>
@@ -7148,7 +7227,6 @@
           <a:p>
             <a:fld id="{565CE74E-AB26-4998-AD42-012C4C1AD076}" type="slidenum">
               <a:rPr lang="zh-CN" altLang="en-US" smtClean="0"/>
-              <a:t>‹#›</a:t>
             </a:fld>
             <a:endParaRPr lang="zh-CN" altLang="en-US"/>
           </a:p>
@@ -7207,6 +7285,7 @@
               <a:rPr lang="zh-CN" altLang="en-US"/>
               <a:t>单击此处编辑母版标题样式</a:t>
             </a:r>
+            <a:endParaRPr lang="zh-CN" altLang="en-US"/>
           </a:p>
         </p:txBody>
       </p:sp>
@@ -7271,6 +7350,7 @@
               <a:rPr lang="zh-CN" altLang="en-US"/>
               <a:t>单击此处编辑母版副标题样式</a:t>
             </a:r>
+            <a:endParaRPr lang="zh-CN" altLang="en-US"/>
           </a:p>
         </p:txBody>
       </p:sp>
@@ -7291,7 +7371,6 @@
           <a:p>
             <a:fld id="{D997B5FA-0921-464F-AAE1-844C04324D75}" type="datetimeFigureOut">
               <a:rPr lang="zh-CN" altLang="en-US" smtClean="0"/>
-              <a:t>2025/4/7</a:t>
             </a:fld>
             <a:endParaRPr lang="zh-CN" altLang="en-US"/>
           </a:p>
@@ -7333,7 +7412,6 @@
           <a:p>
             <a:fld id="{565CE74E-AB26-4998-AD42-012C4C1AD076}" type="slidenum">
               <a:rPr lang="zh-CN" altLang="en-US" smtClean="0"/>
-              <a:t>‹#›</a:t>
             </a:fld>
             <a:endParaRPr lang="zh-CN" altLang="en-US"/>
           </a:p>
@@ -7383,6 +7461,7 @@
               <a:rPr lang="zh-CN" altLang="en-US"/>
               <a:t>单击此处编辑母版标题样式</a:t>
             </a:r>
+            <a:endParaRPr lang="zh-CN" altLang="en-US"/>
           </a:p>
         </p:txBody>
       </p:sp>
@@ -7406,6 +7485,7 @@
               <a:rPr lang="zh-CN" altLang="en-US"/>
               <a:t>单击此处编辑母版文本样式</a:t>
             </a:r>
+            <a:endParaRPr lang="zh-CN" altLang="en-US"/>
           </a:p>
           <a:p>
             <a:pPr lvl="1"/>
@@ -7413,6 +7493,7 @@
               <a:rPr lang="zh-CN" altLang="en-US"/>
               <a:t>第二级</a:t>
             </a:r>
+            <a:endParaRPr lang="zh-CN" altLang="en-US"/>
           </a:p>
           <a:p>
             <a:pPr lvl="2"/>
@@ -7420,6 +7501,7 @@
               <a:rPr lang="zh-CN" altLang="en-US"/>
               <a:t>第三级</a:t>
             </a:r>
+            <a:endParaRPr lang="zh-CN" altLang="en-US"/>
           </a:p>
           <a:p>
             <a:pPr lvl="3"/>
@@ -7427,6 +7509,7 @@
               <a:rPr lang="zh-CN" altLang="en-US"/>
               <a:t>第四级</a:t>
             </a:r>
+            <a:endParaRPr lang="zh-CN" altLang="en-US"/>
           </a:p>
           <a:p>
             <a:pPr lvl="4"/>
@@ -7434,6 +7517,7 @@
               <a:rPr lang="zh-CN" altLang="en-US"/>
               <a:t>第五级</a:t>
             </a:r>
+            <a:endParaRPr lang="zh-CN" altLang="en-US"/>
           </a:p>
         </p:txBody>
       </p:sp>
@@ -7454,7 +7538,6 @@
           <a:p>
             <a:fld id="{D997B5FA-0921-464F-AAE1-844C04324D75}" type="datetimeFigureOut">
               <a:rPr lang="zh-CN" altLang="en-US" smtClean="0"/>
-              <a:t>2025/4/7</a:t>
             </a:fld>
             <a:endParaRPr lang="zh-CN" altLang="en-US"/>
           </a:p>
@@ -7496,7 +7579,6 @@
           <a:p>
             <a:fld id="{565CE74E-AB26-4998-AD42-012C4C1AD076}" type="slidenum">
               <a:rPr lang="zh-CN" altLang="en-US" smtClean="0"/>
-              <a:t>‹#›</a:t>
             </a:fld>
             <a:endParaRPr lang="zh-CN" altLang="en-US"/>
           </a:p>
@@ -7555,6 +7637,7 @@
               <a:rPr lang="zh-CN" altLang="en-US"/>
               <a:t>单击此处编辑母版标题样式</a:t>
             </a:r>
+            <a:endParaRPr lang="zh-CN" altLang="en-US"/>
           </a:p>
         </p:txBody>
       </p:sp>
@@ -7674,6 +7757,7 @@
               <a:rPr lang="zh-CN" altLang="en-US"/>
               <a:t>单击此处编辑母版文本样式</a:t>
             </a:r>
+            <a:endParaRPr lang="zh-CN" altLang="en-US"/>
           </a:p>
         </p:txBody>
       </p:sp>
@@ -7694,7 +7778,6 @@
           <a:p>
             <a:fld id="{D997B5FA-0921-464F-AAE1-844C04324D75}" type="datetimeFigureOut">
               <a:rPr lang="zh-CN" altLang="en-US" smtClean="0"/>
-              <a:t>2025/4/7</a:t>
             </a:fld>
             <a:endParaRPr lang="zh-CN" altLang="en-US"/>
           </a:p>
@@ -7736,7 +7819,6 @@
           <a:p>
             <a:fld id="{565CE74E-AB26-4998-AD42-012C4C1AD076}" type="slidenum">
               <a:rPr lang="zh-CN" altLang="en-US" smtClean="0"/>
-              <a:t>‹#›</a:t>
             </a:fld>
             <a:endParaRPr lang="zh-CN" altLang="en-US"/>
           </a:p>
@@ -7786,6 +7868,7 @@
               <a:rPr lang="zh-CN" altLang="en-US"/>
               <a:t>单击此处编辑母版标题样式</a:t>
             </a:r>
+            <a:endParaRPr lang="zh-CN" altLang="en-US"/>
           </a:p>
         </p:txBody>
       </p:sp>
@@ -7814,6 +7897,7 @@
               <a:rPr lang="zh-CN" altLang="en-US"/>
               <a:t>单击此处编辑母版文本样式</a:t>
             </a:r>
+            <a:endParaRPr lang="zh-CN" altLang="en-US"/>
           </a:p>
           <a:p>
             <a:pPr lvl="1"/>
@@ -7821,6 +7905,7 @@
               <a:rPr lang="zh-CN" altLang="en-US"/>
               <a:t>第二级</a:t>
             </a:r>
+            <a:endParaRPr lang="zh-CN" altLang="en-US"/>
           </a:p>
           <a:p>
             <a:pPr lvl="2"/>
@@ -7828,6 +7913,7 @@
               <a:rPr lang="zh-CN" altLang="en-US"/>
               <a:t>第三级</a:t>
             </a:r>
+            <a:endParaRPr lang="zh-CN" altLang="en-US"/>
           </a:p>
           <a:p>
             <a:pPr lvl="3"/>
@@ -7835,6 +7921,7 @@
               <a:rPr lang="zh-CN" altLang="en-US"/>
               <a:t>第四级</a:t>
             </a:r>
+            <a:endParaRPr lang="zh-CN" altLang="en-US"/>
           </a:p>
           <a:p>
             <a:pPr lvl="4"/>
@@ -7842,6 +7929,7 @@
               <a:rPr lang="zh-CN" altLang="en-US"/>
               <a:t>第五级</a:t>
             </a:r>
+            <a:endParaRPr lang="zh-CN" altLang="en-US"/>
           </a:p>
         </p:txBody>
       </p:sp>
@@ -7870,6 +7958,7 @@
               <a:rPr lang="zh-CN" altLang="en-US"/>
               <a:t>单击此处编辑母版文本样式</a:t>
             </a:r>
+            <a:endParaRPr lang="zh-CN" altLang="en-US"/>
           </a:p>
           <a:p>
             <a:pPr lvl="1"/>
@@ -7877,6 +7966,7 @@
               <a:rPr lang="zh-CN" altLang="en-US"/>
               <a:t>第二级</a:t>
             </a:r>
+            <a:endParaRPr lang="zh-CN" altLang="en-US"/>
           </a:p>
           <a:p>
             <a:pPr lvl="2"/>
@@ -7884,6 +7974,7 @@
               <a:rPr lang="zh-CN" altLang="en-US"/>
               <a:t>第三级</a:t>
             </a:r>
+            <a:endParaRPr lang="zh-CN" altLang="en-US"/>
           </a:p>
           <a:p>
             <a:pPr lvl="3"/>
@@ -7891,6 +7982,7 @@
               <a:rPr lang="zh-CN" altLang="en-US"/>
               <a:t>第四级</a:t>
             </a:r>
+            <a:endParaRPr lang="zh-CN" altLang="en-US"/>
           </a:p>
           <a:p>
             <a:pPr lvl="4"/>
@@ -7898,6 +7990,7 @@
               <a:rPr lang="zh-CN" altLang="en-US"/>
               <a:t>第五级</a:t>
             </a:r>
+            <a:endParaRPr lang="zh-CN" altLang="en-US"/>
           </a:p>
         </p:txBody>
       </p:sp>
@@ -7918,7 +8011,6 @@
           <a:p>
             <a:fld id="{D997B5FA-0921-464F-AAE1-844C04324D75}" type="datetimeFigureOut">
               <a:rPr lang="zh-CN" altLang="en-US" smtClean="0"/>
-              <a:t>2025/4/7</a:t>
             </a:fld>
             <a:endParaRPr lang="zh-CN" altLang="en-US"/>
           </a:p>
@@ -7960,7 +8052,6 @@
           <a:p>
             <a:fld id="{565CE74E-AB26-4998-AD42-012C4C1AD076}" type="slidenum">
               <a:rPr lang="zh-CN" altLang="en-US" smtClean="0"/>
-              <a:t>‹#›</a:t>
             </a:fld>
             <a:endParaRPr lang="zh-CN" altLang="en-US"/>
           </a:p>
@@ -8015,6 +8106,7 @@
               <a:rPr lang="zh-CN" altLang="en-US"/>
               <a:t>单击此处编辑母版标题样式</a:t>
             </a:r>
+            <a:endParaRPr lang="zh-CN" altLang="en-US"/>
           </a:p>
         </p:txBody>
       </p:sp>
@@ -8080,6 +8172,7 @@
               <a:rPr lang="zh-CN" altLang="en-US"/>
               <a:t>单击此处编辑母版文本样式</a:t>
             </a:r>
+            <a:endParaRPr lang="zh-CN" altLang="en-US"/>
           </a:p>
         </p:txBody>
       </p:sp>
@@ -8108,6 +8201,7 @@
               <a:rPr lang="zh-CN" altLang="en-US"/>
               <a:t>单击此处编辑母版文本样式</a:t>
             </a:r>
+            <a:endParaRPr lang="zh-CN" altLang="en-US"/>
           </a:p>
           <a:p>
             <a:pPr lvl="1"/>
@@ -8115,6 +8209,7 @@
               <a:rPr lang="zh-CN" altLang="en-US"/>
               <a:t>第二级</a:t>
             </a:r>
+            <a:endParaRPr lang="zh-CN" altLang="en-US"/>
           </a:p>
           <a:p>
             <a:pPr lvl="2"/>
@@ -8122,6 +8217,7 @@
               <a:rPr lang="zh-CN" altLang="en-US"/>
               <a:t>第三级</a:t>
             </a:r>
+            <a:endParaRPr lang="zh-CN" altLang="en-US"/>
           </a:p>
           <a:p>
             <a:pPr lvl="3"/>
@@ -8129,6 +8225,7 @@
               <a:rPr lang="zh-CN" altLang="en-US"/>
               <a:t>第四级</a:t>
             </a:r>
+            <a:endParaRPr lang="zh-CN" altLang="en-US"/>
           </a:p>
           <a:p>
             <a:pPr lvl="4"/>
@@ -8136,6 +8233,7 @@
               <a:rPr lang="zh-CN" altLang="en-US"/>
               <a:t>第五级</a:t>
             </a:r>
+            <a:endParaRPr lang="zh-CN" altLang="en-US"/>
           </a:p>
         </p:txBody>
       </p:sp>
@@ -8201,6 +8299,7 @@
               <a:rPr lang="zh-CN" altLang="en-US"/>
               <a:t>单击此处编辑母版文本样式</a:t>
             </a:r>
+            <a:endParaRPr lang="zh-CN" altLang="en-US"/>
           </a:p>
         </p:txBody>
       </p:sp>
@@ -8229,6 +8328,7 @@
               <a:rPr lang="zh-CN" altLang="en-US"/>
               <a:t>单击此处编辑母版文本样式</a:t>
             </a:r>
+            <a:endParaRPr lang="zh-CN" altLang="en-US"/>
           </a:p>
           <a:p>
             <a:pPr lvl="1"/>
@@ -8236,6 +8336,7 @@
               <a:rPr lang="zh-CN" altLang="en-US"/>
               <a:t>第二级</a:t>
             </a:r>
+            <a:endParaRPr lang="zh-CN" altLang="en-US"/>
           </a:p>
           <a:p>
             <a:pPr lvl="2"/>
@@ -8243,6 +8344,7 @@
               <a:rPr lang="zh-CN" altLang="en-US"/>
               <a:t>第三级</a:t>
             </a:r>
+            <a:endParaRPr lang="zh-CN" altLang="en-US"/>
           </a:p>
           <a:p>
             <a:pPr lvl="3"/>
@@ -8250,6 +8352,7 @@
               <a:rPr lang="zh-CN" altLang="en-US"/>
               <a:t>第四级</a:t>
             </a:r>
+            <a:endParaRPr lang="zh-CN" altLang="en-US"/>
           </a:p>
           <a:p>
             <a:pPr lvl="4"/>
@@ -8257,6 +8360,7 @@
               <a:rPr lang="zh-CN" altLang="en-US"/>
               <a:t>第五级</a:t>
             </a:r>
+            <a:endParaRPr lang="zh-CN" altLang="en-US"/>
           </a:p>
         </p:txBody>
       </p:sp>
@@ -8277,7 +8381,6 @@
           <a:p>
             <a:fld id="{D997B5FA-0921-464F-AAE1-844C04324D75}" type="datetimeFigureOut">
               <a:rPr lang="zh-CN" altLang="en-US" smtClean="0"/>
-              <a:t>2025/4/7</a:t>
             </a:fld>
             <a:endParaRPr lang="zh-CN" altLang="en-US"/>
           </a:p>
@@ -8319,7 +8422,6 @@
           <a:p>
             <a:fld id="{565CE74E-AB26-4998-AD42-012C4C1AD076}" type="slidenum">
               <a:rPr lang="zh-CN" altLang="en-US" smtClean="0"/>
-              <a:t>‹#›</a:t>
             </a:fld>
             <a:endParaRPr lang="zh-CN" altLang="en-US"/>
           </a:p>
@@ -8369,6 +8471,7 @@
               <a:rPr lang="zh-CN" altLang="en-US"/>
               <a:t>单击此处编辑母版标题样式</a:t>
             </a:r>
+            <a:endParaRPr lang="zh-CN" altLang="en-US"/>
           </a:p>
         </p:txBody>
       </p:sp>
@@ -8389,7 +8492,6 @@
           <a:p>
             <a:fld id="{D997B5FA-0921-464F-AAE1-844C04324D75}" type="datetimeFigureOut">
               <a:rPr lang="zh-CN" altLang="en-US" smtClean="0"/>
-              <a:t>2025/4/7</a:t>
             </a:fld>
             <a:endParaRPr lang="zh-CN" altLang="en-US"/>
           </a:p>
@@ -8431,7 +8533,6 @@
           <a:p>
             <a:fld id="{565CE74E-AB26-4998-AD42-012C4C1AD076}" type="slidenum">
               <a:rPr lang="zh-CN" altLang="en-US" smtClean="0"/>
-              <a:t>‹#›</a:t>
             </a:fld>
             <a:endParaRPr lang="zh-CN" altLang="en-US"/>
           </a:p>
@@ -8479,7 +8580,6 @@
           <a:p>
             <a:fld id="{D997B5FA-0921-464F-AAE1-844C04324D75}" type="datetimeFigureOut">
               <a:rPr lang="zh-CN" altLang="en-US" smtClean="0"/>
-              <a:t>2025/4/7</a:t>
             </a:fld>
             <a:endParaRPr lang="zh-CN" altLang="en-US"/>
           </a:p>
@@ -8521,7 +8621,6 @@
           <a:p>
             <a:fld id="{565CE74E-AB26-4998-AD42-012C4C1AD076}" type="slidenum">
               <a:rPr lang="zh-CN" altLang="en-US" smtClean="0"/>
-              <a:t>‹#›</a:t>
             </a:fld>
             <a:endParaRPr lang="zh-CN" altLang="en-US"/>
           </a:p>
@@ -8580,6 +8679,7 @@
               <a:rPr lang="zh-CN" altLang="en-US"/>
               <a:t>单击此处编辑母版标题样式</a:t>
             </a:r>
+            <a:endParaRPr lang="zh-CN" altLang="en-US"/>
           </a:p>
         </p:txBody>
       </p:sp>
@@ -8636,6 +8736,7 @@
               <a:rPr lang="zh-CN" altLang="en-US"/>
               <a:t>单击此处编辑母版文本样式</a:t>
             </a:r>
+            <a:endParaRPr lang="zh-CN" altLang="en-US"/>
           </a:p>
           <a:p>
             <a:pPr lvl="1"/>
@@ -8643,6 +8744,7 @@
               <a:rPr lang="zh-CN" altLang="en-US"/>
               <a:t>第二级</a:t>
             </a:r>
+            <a:endParaRPr lang="zh-CN" altLang="en-US"/>
           </a:p>
           <a:p>
             <a:pPr lvl="2"/>
@@ -8650,6 +8752,7 @@
               <a:rPr lang="zh-CN" altLang="en-US"/>
               <a:t>第三级</a:t>
             </a:r>
+            <a:endParaRPr lang="zh-CN" altLang="en-US"/>
           </a:p>
           <a:p>
             <a:pPr lvl="3"/>
@@ -8657,6 +8760,7 @@
               <a:rPr lang="zh-CN" altLang="en-US"/>
               <a:t>第四级</a:t>
             </a:r>
+            <a:endParaRPr lang="zh-CN" altLang="en-US"/>
           </a:p>
           <a:p>
             <a:pPr lvl="4"/>
@@ -8664,6 +8768,7 @@
               <a:rPr lang="zh-CN" altLang="en-US"/>
               <a:t>第五级</a:t>
             </a:r>
+            <a:endParaRPr lang="zh-CN" altLang="en-US"/>
           </a:p>
         </p:txBody>
       </p:sp>
@@ -8729,6 +8834,7 @@
               <a:rPr lang="zh-CN" altLang="en-US"/>
               <a:t>单击此处编辑母版文本样式</a:t>
             </a:r>
+            <a:endParaRPr lang="zh-CN" altLang="en-US"/>
           </a:p>
         </p:txBody>
       </p:sp>
@@ -8749,7 +8855,6 @@
           <a:p>
             <a:fld id="{D997B5FA-0921-464F-AAE1-844C04324D75}" type="datetimeFigureOut">
               <a:rPr lang="zh-CN" altLang="en-US" smtClean="0"/>
-              <a:t>2025/4/7</a:t>
             </a:fld>
             <a:endParaRPr lang="zh-CN" altLang="en-US"/>
           </a:p>
@@ -8791,7 +8896,6 @@
           <a:p>
             <a:fld id="{565CE74E-AB26-4998-AD42-012C4C1AD076}" type="slidenum">
               <a:rPr lang="zh-CN" altLang="en-US" smtClean="0"/>
-              <a:t>‹#›</a:t>
             </a:fld>
             <a:endParaRPr lang="zh-CN" altLang="en-US"/>
           </a:p>
@@ -8850,6 +8954,7 @@
               <a:rPr lang="zh-CN" altLang="en-US"/>
               <a:t>单击此处编辑母版标题样式</a:t>
             </a:r>
+            <a:endParaRPr lang="zh-CN" altLang="en-US"/>
           </a:p>
         </p:txBody>
       </p:sp>
@@ -8976,6 +9081,7 @@
               <a:rPr lang="zh-CN" altLang="en-US"/>
               <a:t>单击此处编辑母版文本样式</a:t>
             </a:r>
+            <a:endParaRPr lang="zh-CN" altLang="en-US"/>
           </a:p>
         </p:txBody>
       </p:sp>
@@ -8996,7 +9102,6 @@
           <a:p>
             <a:fld id="{D997B5FA-0921-464F-AAE1-844C04324D75}" type="datetimeFigureOut">
               <a:rPr lang="zh-CN" altLang="en-US" smtClean="0"/>
-              <a:t>2025/4/7</a:t>
             </a:fld>
             <a:endParaRPr lang="zh-CN" altLang="en-US"/>
           </a:p>
@@ -9038,7 +9143,6 @@
           <a:p>
             <a:fld id="{565CE74E-AB26-4998-AD42-012C4C1AD076}" type="slidenum">
               <a:rPr lang="zh-CN" altLang="en-US" smtClean="0"/>
-              <a:t>‹#›</a:t>
             </a:fld>
             <a:endParaRPr lang="zh-CN" altLang="en-US"/>
           </a:p>
@@ -9088,6 +9192,7 @@
               <a:rPr lang="zh-CN" altLang="en-US"/>
               <a:t>单击此处编辑母版标题样式</a:t>
             </a:r>
+            <a:endParaRPr lang="zh-CN" altLang="en-US"/>
           </a:p>
         </p:txBody>
       </p:sp>
@@ -9111,6 +9216,7 @@
               <a:rPr lang="zh-CN" altLang="en-US"/>
               <a:t>单击此处编辑母版文本样式</a:t>
             </a:r>
+            <a:endParaRPr lang="zh-CN" altLang="en-US"/>
           </a:p>
           <a:p>
             <a:pPr lvl="1"/>
@@ -9118,6 +9224,7 @@
               <a:rPr lang="zh-CN" altLang="en-US"/>
               <a:t>第二级</a:t>
             </a:r>
+            <a:endParaRPr lang="zh-CN" altLang="en-US"/>
           </a:p>
           <a:p>
             <a:pPr lvl="2"/>
@@ -9125,6 +9232,7 @@
               <a:rPr lang="zh-CN" altLang="en-US"/>
               <a:t>第三级</a:t>
             </a:r>
+            <a:endParaRPr lang="zh-CN" altLang="en-US"/>
           </a:p>
           <a:p>
             <a:pPr lvl="3"/>
@@ -9132,6 +9240,7 @@
               <a:rPr lang="zh-CN" altLang="en-US"/>
               <a:t>第四级</a:t>
             </a:r>
+            <a:endParaRPr lang="zh-CN" altLang="en-US"/>
           </a:p>
           <a:p>
             <a:pPr lvl="4"/>
@@ -9139,6 +9248,7 @@
               <a:rPr lang="zh-CN" altLang="en-US"/>
               <a:t>第五级</a:t>
             </a:r>
+            <a:endParaRPr lang="zh-CN" altLang="en-US"/>
           </a:p>
         </p:txBody>
       </p:sp>
@@ -9159,7 +9269,6 @@
           <a:p>
             <a:fld id="{D997B5FA-0921-464F-AAE1-844C04324D75}" type="datetimeFigureOut">
               <a:rPr lang="zh-CN" altLang="en-US" smtClean="0"/>
-              <a:t>2025/4/7</a:t>
             </a:fld>
             <a:endParaRPr lang="zh-CN" altLang="en-US"/>
           </a:p>
@@ -9201,7 +9310,6 @@
           <a:p>
             <a:fld id="{565CE74E-AB26-4998-AD42-012C4C1AD076}" type="slidenum">
               <a:rPr lang="zh-CN" altLang="en-US" smtClean="0"/>
-              <a:t>‹#›</a:t>
             </a:fld>
             <a:endParaRPr lang="zh-CN" altLang="en-US"/>
           </a:p>
@@ -9256,6 +9364,7 @@
               <a:rPr lang="zh-CN" altLang="en-US"/>
               <a:t>单击此处编辑母版标题样式</a:t>
             </a:r>
+            <a:endParaRPr lang="zh-CN" altLang="en-US"/>
           </a:p>
         </p:txBody>
       </p:sp>
@@ -9321,6 +9430,7 @@
               <a:rPr lang="zh-CN" altLang="en-US"/>
               <a:t>单击此处编辑母版文本样式</a:t>
             </a:r>
+            <a:endParaRPr lang="zh-CN" altLang="en-US"/>
           </a:p>
         </p:txBody>
       </p:sp>
@@ -9349,6 +9459,7 @@
               <a:rPr lang="zh-CN" altLang="en-US"/>
               <a:t>单击此处编辑母版文本样式</a:t>
             </a:r>
+            <a:endParaRPr lang="zh-CN" altLang="en-US"/>
           </a:p>
           <a:p>
             <a:pPr lvl="1"/>
@@ -9356,6 +9467,7 @@
               <a:rPr lang="zh-CN" altLang="en-US"/>
               <a:t>第二级</a:t>
             </a:r>
+            <a:endParaRPr lang="zh-CN" altLang="en-US"/>
           </a:p>
           <a:p>
             <a:pPr lvl="2"/>
@@ -9363,6 +9475,7 @@
               <a:rPr lang="zh-CN" altLang="en-US"/>
               <a:t>第三级</a:t>
             </a:r>
+            <a:endParaRPr lang="zh-CN" altLang="en-US"/>
           </a:p>
           <a:p>
             <a:pPr lvl="3"/>
@@ -9370,6 +9483,7 @@
               <a:rPr lang="zh-CN" altLang="en-US"/>
               <a:t>第四级</a:t>
             </a:r>
+            <a:endParaRPr lang="zh-CN" altLang="en-US"/>
           </a:p>
           <a:p>
             <a:pPr lvl="4"/>
@@ -9377,6 +9491,7 @@
               <a:rPr lang="zh-CN" altLang="en-US"/>
               <a:t>第五级</a:t>
             </a:r>
+            <a:endParaRPr lang="zh-CN" altLang="en-US"/>
           </a:p>
         </p:txBody>
       </p:sp>
@@ -9442,6 +9557,7 @@
               <a:rPr lang="zh-CN" altLang="en-US"/>
               <a:t>单击此处编辑母版文本样式</a:t>
             </a:r>
+            <a:endParaRPr lang="zh-CN" altLang="en-US"/>
           </a:p>
         </p:txBody>
       </p:sp>
@@ -9470,6 +9586,7 @@
               <a:rPr lang="zh-CN" altLang="en-US"/>
               <a:t>单击此处编辑母版文本样式</a:t>
             </a:r>
+            <a:endParaRPr lang="zh-CN" altLang="en-US"/>
           </a:p>
           <a:p>
             <a:pPr lvl="1"/>
@@ -9477,6 +9594,7 @@
               <a:rPr lang="zh-CN" altLang="en-US"/>
               <a:t>第二级</a:t>
             </a:r>
+            <a:endParaRPr lang="zh-CN" altLang="en-US"/>
           </a:p>
           <a:p>
             <a:pPr lvl="2"/>
@@ -9484,6 +9602,7 @@
               <a:rPr lang="zh-CN" altLang="en-US"/>
               <a:t>第三级</a:t>
             </a:r>
+            <a:endParaRPr lang="zh-CN" altLang="en-US"/>
           </a:p>
           <a:p>
             <a:pPr lvl="3"/>
@@ -9491,6 +9610,7 @@
               <a:rPr lang="zh-CN" altLang="en-US"/>
               <a:t>第四级</a:t>
             </a:r>
+            <a:endParaRPr lang="zh-CN" altLang="en-US"/>
           </a:p>
           <a:p>
             <a:pPr lvl="4"/>
@@ -9498,6 +9618,7 @@
               <a:rPr lang="zh-CN" altLang="en-US"/>
               <a:t>第五级</a:t>
             </a:r>
+            <a:endParaRPr lang="zh-CN" altLang="en-US"/>
           </a:p>
         </p:txBody>
       </p:sp>
@@ -9518,7 +9639,6 @@
           <a:p>
             <a:fld id="{D997B5FA-0921-464F-AAE1-844C04324D75}" type="datetimeFigureOut">
               <a:rPr lang="zh-CN" altLang="en-US" smtClean="0"/>
-              <a:t>2025/4/7</a:t>
             </a:fld>
             <a:endParaRPr lang="zh-CN" altLang="en-US"/>
           </a:p>
@@ -9560,7 +9680,6 @@
           <a:p>
             <a:fld id="{565CE74E-AB26-4998-AD42-012C4C1AD076}" type="slidenum">
               <a:rPr lang="zh-CN" altLang="en-US" smtClean="0"/>
-              <a:t>‹#›</a:t>
             </a:fld>
             <a:endParaRPr lang="zh-CN" altLang="en-US"/>
           </a:p>
@@ -9615,6 +9734,7 @@
               <a:rPr lang="zh-CN" altLang="en-US"/>
               <a:t>单击此处编辑母版标题样式</a:t>
             </a:r>
+            <a:endParaRPr lang="zh-CN" altLang="en-US"/>
           </a:p>
         </p:txBody>
       </p:sp>
@@ -9643,6 +9763,7 @@
               <a:rPr lang="zh-CN" altLang="en-US"/>
               <a:t>单击此处编辑母版文本样式</a:t>
             </a:r>
+            <a:endParaRPr lang="zh-CN" altLang="en-US"/>
           </a:p>
           <a:p>
             <a:pPr lvl="1"/>
@@ -9650,6 +9771,7 @@
               <a:rPr lang="zh-CN" altLang="en-US"/>
               <a:t>第二级</a:t>
             </a:r>
+            <a:endParaRPr lang="zh-CN" altLang="en-US"/>
           </a:p>
           <a:p>
             <a:pPr lvl="2"/>
@@ -9657,6 +9779,7 @@
               <a:rPr lang="zh-CN" altLang="en-US"/>
               <a:t>第三级</a:t>
             </a:r>
+            <a:endParaRPr lang="zh-CN" altLang="en-US"/>
           </a:p>
           <a:p>
             <a:pPr lvl="3"/>
@@ -9664,6 +9787,7 @@
               <a:rPr lang="zh-CN" altLang="en-US"/>
               <a:t>第四级</a:t>
             </a:r>
+            <a:endParaRPr lang="zh-CN" altLang="en-US"/>
           </a:p>
           <a:p>
             <a:pPr lvl="4"/>
@@ -9671,6 +9795,7 @@
               <a:rPr lang="zh-CN" altLang="en-US"/>
               <a:t>第五级</a:t>
             </a:r>
+            <a:endParaRPr lang="zh-CN" altLang="en-US"/>
           </a:p>
         </p:txBody>
       </p:sp>
@@ -9691,7 +9816,6 @@
           <a:p>
             <a:fld id="{D997B5FA-0921-464F-AAE1-844C04324D75}" type="datetimeFigureOut">
               <a:rPr lang="zh-CN" altLang="en-US" smtClean="0"/>
-              <a:t>2025/4/7</a:t>
             </a:fld>
             <a:endParaRPr lang="zh-CN" altLang="en-US"/>
           </a:p>
@@ -9733,7 +9857,6 @@
           <a:p>
             <a:fld id="{565CE74E-AB26-4998-AD42-012C4C1AD076}" type="slidenum">
               <a:rPr lang="zh-CN" altLang="en-US" smtClean="0"/>
-              <a:t>‹#›</a:t>
             </a:fld>
             <a:endParaRPr lang="zh-CN" altLang="en-US"/>
           </a:p>
@@ -9972,6 +10095,7 @@
               <a:rPr lang="zh-CN" altLang="en-US"/>
               <a:t>单击此处编辑母版标题样式</a:t>
             </a:r>
+            <a:endParaRPr lang="zh-CN" altLang="en-US"/>
           </a:p>
         </p:txBody>
       </p:sp>
@@ -9992,7 +10116,6 @@
           <a:p>
             <a:fld id="{D997B5FA-0921-464F-AAE1-844C04324D75}" type="datetimeFigureOut">
               <a:rPr lang="zh-CN" altLang="en-US" smtClean="0"/>
-              <a:t>2025/4/7</a:t>
             </a:fld>
             <a:endParaRPr lang="zh-CN" altLang="en-US"/>
           </a:p>
@@ -10034,7 +10157,6 @@
           <a:p>
             <a:fld id="{565CE74E-AB26-4998-AD42-012C4C1AD076}" type="slidenum">
               <a:rPr lang="zh-CN" altLang="en-US" smtClean="0"/>
-              <a:t>‹#›</a:t>
             </a:fld>
             <a:endParaRPr lang="zh-CN" altLang="en-US"/>
           </a:p>
@@ -10082,7 +10204,6 @@
           <a:p>
             <a:fld id="{D997B5FA-0921-464F-AAE1-844C04324D75}" type="datetimeFigureOut">
               <a:rPr lang="zh-CN" altLang="en-US" smtClean="0"/>
-              <a:t>2025/4/7</a:t>
             </a:fld>
             <a:endParaRPr lang="zh-CN" altLang="en-US"/>
           </a:p>
@@ -10124,7 +10245,6 @@
           <a:p>
             <a:fld id="{565CE74E-AB26-4998-AD42-012C4C1AD076}" type="slidenum">
               <a:rPr lang="zh-CN" altLang="en-US" smtClean="0"/>
-              <a:t>‹#›</a:t>
             </a:fld>
             <a:endParaRPr lang="zh-CN" altLang="en-US"/>
           </a:p>
@@ -10183,6 +10303,7 @@
               <a:rPr lang="zh-CN" altLang="en-US"/>
               <a:t>单击此处编辑母版标题样式</a:t>
             </a:r>
+            <a:endParaRPr lang="zh-CN" altLang="en-US"/>
           </a:p>
         </p:txBody>
       </p:sp>
@@ -10239,6 +10360,7 @@
               <a:rPr lang="zh-CN" altLang="en-US"/>
               <a:t>单击此处编辑母版文本样式</a:t>
             </a:r>
+            <a:endParaRPr lang="zh-CN" altLang="en-US"/>
           </a:p>
           <a:p>
             <a:pPr lvl="1"/>
@@ -10246,6 +10368,7 @@
               <a:rPr lang="zh-CN" altLang="en-US"/>
               <a:t>第二级</a:t>
             </a:r>
+            <a:endParaRPr lang="zh-CN" altLang="en-US"/>
           </a:p>
           <a:p>
             <a:pPr lvl="2"/>
@@ -10253,6 +10376,7 @@
               <a:rPr lang="zh-CN" altLang="en-US"/>
               <a:t>第三级</a:t>
             </a:r>
+            <a:endParaRPr lang="zh-CN" altLang="en-US"/>
           </a:p>
           <a:p>
             <a:pPr lvl="3"/>
@@ -10260,6 +10384,7 @@
               <a:rPr lang="zh-CN" altLang="en-US"/>
               <a:t>第四级</a:t>
             </a:r>
+            <a:endParaRPr lang="zh-CN" altLang="en-US"/>
           </a:p>
           <a:p>
             <a:pPr lvl="4"/>
@@ -10267,6 +10392,7 @@
               <a:rPr lang="zh-CN" altLang="en-US"/>
               <a:t>第五级</a:t>
             </a:r>
+            <a:endParaRPr lang="zh-CN" altLang="en-US"/>
           </a:p>
         </p:txBody>
       </p:sp>
@@ -10332,6 +10458,7 @@
               <a:rPr lang="zh-CN" altLang="en-US"/>
               <a:t>单击此处编辑母版文本样式</a:t>
             </a:r>
+            <a:endParaRPr lang="zh-CN" altLang="en-US"/>
           </a:p>
         </p:txBody>
       </p:sp>
@@ -10352,7 +10479,6 @@
           <a:p>
             <a:fld id="{D997B5FA-0921-464F-AAE1-844C04324D75}" type="datetimeFigureOut">
               <a:rPr lang="zh-CN" altLang="en-US" smtClean="0"/>
-              <a:t>2025/4/7</a:t>
             </a:fld>
             <a:endParaRPr lang="zh-CN" altLang="en-US"/>
           </a:p>
@@ -10394,7 +10520,6 @@
           <a:p>
             <a:fld id="{565CE74E-AB26-4998-AD42-012C4C1AD076}" type="slidenum">
               <a:rPr lang="zh-CN" altLang="en-US" smtClean="0"/>
-              <a:t>‹#›</a:t>
             </a:fld>
             <a:endParaRPr lang="zh-CN" altLang="en-US"/>
           </a:p>
@@ -10453,6 +10578,7 @@
               <a:rPr lang="zh-CN" altLang="en-US"/>
               <a:t>单击此处编辑母版标题样式</a:t>
             </a:r>
+            <a:endParaRPr lang="zh-CN" altLang="en-US"/>
           </a:p>
         </p:txBody>
       </p:sp>
@@ -10579,6 +10705,7 @@
               <a:rPr lang="zh-CN" altLang="en-US"/>
               <a:t>单击此处编辑母版文本样式</a:t>
             </a:r>
+            <a:endParaRPr lang="zh-CN" altLang="en-US"/>
           </a:p>
         </p:txBody>
       </p:sp>
@@ -10599,7 +10726,6 @@
           <a:p>
             <a:fld id="{D997B5FA-0921-464F-AAE1-844C04324D75}" type="datetimeFigureOut">
               <a:rPr lang="zh-CN" altLang="en-US" smtClean="0"/>
-              <a:t>2025/4/7</a:t>
             </a:fld>
             <a:endParaRPr lang="zh-CN" altLang="en-US"/>
           </a:p>
@@ -10641,7 +10767,6 @@
           <a:p>
             <a:fld id="{565CE74E-AB26-4998-AD42-012C4C1AD076}" type="slidenum">
               <a:rPr lang="zh-CN" altLang="en-US" smtClean="0"/>
-              <a:t>‹#›</a:t>
             </a:fld>
             <a:endParaRPr lang="zh-CN" altLang="en-US"/>
           </a:p>
@@ -10706,6 +10831,7 @@
               <a:rPr lang="zh-CN" altLang="en-US"/>
               <a:t>单击此处编辑母版标题样式</a:t>
             </a:r>
+            <a:endParaRPr lang="zh-CN" altLang="en-US"/>
           </a:p>
         </p:txBody>
       </p:sp>
@@ -10739,6 +10865,7 @@
               <a:rPr lang="zh-CN" altLang="en-US"/>
               <a:t>单击此处编辑母版文本样式</a:t>
             </a:r>
+            <a:endParaRPr lang="zh-CN" altLang="en-US"/>
           </a:p>
           <a:p>
             <a:pPr lvl="1"/>
@@ -10746,6 +10873,7 @@
               <a:rPr lang="zh-CN" altLang="en-US"/>
               <a:t>第二级</a:t>
             </a:r>
+            <a:endParaRPr lang="zh-CN" altLang="en-US"/>
           </a:p>
           <a:p>
             <a:pPr lvl="2"/>
@@ -10753,6 +10881,7 @@
               <a:rPr lang="zh-CN" altLang="en-US"/>
               <a:t>第三级</a:t>
             </a:r>
+            <a:endParaRPr lang="zh-CN" altLang="en-US"/>
           </a:p>
           <a:p>
             <a:pPr lvl="3"/>
@@ -10760,6 +10889,7 @@
               <a:rPr lang="zh-CN" altLang="en-US"/>
               <a:t>第四级</a:t>
             </a:r>
+            <a:endParaRPr lang="zh-CN" altLang="en-US"/>
           </a:p>
           <a:p>
             <a:pPr lvl="4"/>
@@ -10767,6 +10897,7 @@
               <a:rPr lang="zh-CN" altLang="en-US"/>
               <a:t>第五级</a:t>
             </a:r>
+            <a:endParaRPr lang="zh-CN" altLang="en-US"/>
           </a:p>
         </p:txBody>
       </p:sp>
@@ -10805,7 +10936,6 @@
           <a:p>
             <a:fld id="{D997B5FA-0921-464F-AAE1-844C04324D75}" type="datetimeFigureOut">
               <a:rPr lang="zh-CN" altLang="en-US" smtClean="0"/>
-              <a:t>2025/4/7</a:t>
             </a:fld>
             <a:endParaRPr lang="zh-CN" altLang="en-US"/>
           </a:p>
@@ -10883,7 +11013,6 @@
           <a:p>
             <a:fld id="{565CE74E-AB26-4998-AD42-012C4C1AD076}" type="slidenum">
               <a:rPr lang="zh-CN" altLang="en-US" smtClean="0"/>
-              <a:t>‹#›</a:t>
             </a:fld>
             <a:endParaRPr lang="zh-CN" altLang="en-US"/>
           </a:p>
@@ -10935,7 +11064,7 @@
         <a:spcBef>
           <a:spcPts val="1000"/>
         </a:spcBef>
-        <a:buFont typeface="Arial" panose="020B0604020202020204" pitchFamily="34" charset="0"/>
+        <a:buFont typeface="Arial" panose="020B0604020202090204" pitchFamily="34" charset="0"/>
         <a:buChar char="•"/>
         <a:defRPr sz="2800" kern="1200">
           <a:solidFill>
@@ -10953,7 +11082,7 @@
         <a:spcBef>
           <a:spcPts val="500"/>
         </a:spcBef>
-        <a:buFont typeface="Arial" panose="020B0604020202020204" pitchFamily="34" charset="0"/>
+        <a:buFont typeface="Arial" panose="020B0604020202090204" pitchFamily="34" charset="0"/>
         <a:buChar char="•"/>
         <a:defRPr sz="2400" kern="1200">
           <a:solidFill>
@@ -10971,7 +11100,7 @@
         <a:spcBef>
           <a:spcPts val="500"/>
         </a:spcBef>
-        <a:buFont typeface="Arial" panose="020B0604020202020204" pitchFamily="34" charset="0"/>
+        <a:buFont typeface="Arial" panose="020B0604020202090204" pitchFamily="34" charset="0"/>
         <a:buChar char="•"/>
         <a:defRPr sz="2000" kern="1200">
           <a:solidFill>
@@ -10989,7 +11118,7 @@
         <a:spcBef>
           <a:spcPts val="500"/>
         </a:spcBef>
-        <a:buFont typeface="Arial" panose="020B0604020202020204" pitchFamily="34" charset="0"/>
+        <a:buFont typeface="Arial" panose="020B0604020202090204" pitchFamily="34" charset="0"/>
         <a:buChar char="•"/>
         <a:defRPr sz="1800" kern="1200">
           <a:solidFill>
@@ -11007,7 +11136,7 @@
         <a:spcBef>
           <a:spcPts val="500"/>
         </a:spcBef>
-        <a:buFont typeface="Arial" panose="020B0604020202020204" pitchFamily="34" charset="0"/>
+        <a:buFont typeface="Arial" panose="020B0604020202090204" pitchFamily="34" charset="0"/>
         <a:buChar char="•"/>
         <a:defRPr sz="1800" kern="1200">
           <a:solidFill>
@@ -11025,7 +11154,7 @@
         <a:spcBef>
           <a:spcPts val="500"/>
         </a:spcBef>
-        <a:buFont typeface="Arial" panose="020B0604020202020204" pitchFamily="34" charset="0"/>
+        <a:buFont typeface="Arial" panose="020B0604020202090204" pitchFamily="34" charset="0"/>
         <a:buChar char="•"/>
         <a:defRPr sz="1800" kern="1200">
           <a:solidFill>
@@ -11043,7 +11172,7 @@
         <a:spcBef>
           <a:spcPts val="500"/>
         </a:spcBef>
-        <a:buFont typeface="Arial" panose="020B0604020202020204" pitchFamily="34" charset="0"/>
+        <a:buFont typeface="Arial" panose="020B0604020202090204" pitchFamily="34" charset="0"/>
         <a:buChar char="•"/>
         <a:defRPr sz="1800" kern="1200">
           <a:solidFill>
@@ -11061,7 +11190,7 @@
         <a:spcBef>
           <a:spcPts val="500"/>
         </a:spcBef>
-        <a:buFont typeface="Arial" panose="020B0604020202020204" pitchFamily="34" charset="0"/>
+        <a:buFont typeface="Arial" panose="020B0604020202090204" pitchFamily="34" charset="0"/>
         <a:buChar char="•"/>
         <a:defRPr sz="1800" kern="1200">
           <a:solidFill>
@@ -11079,7 +11208,7 @@
         <a:spcBef>
           <a:spcPts val="500"/>
         </a:spcBef>
-        <a:buFont typeface="Arial" panose="020B0604020202020204" pitchFamily="34" charset="0"/>
+        <a:buFont typeface="Arial" panose="020B0604020202090204" pitchFamily="34" charset="0"/>
         <a:buChar char="•"/>
         <a:defRPr sz="1800" kern="1200">
           <a:solidFill>
@@ -11241,6 +11370,7 @@
               <a:rPr lang="zh-CN" altLang="en-US"/>
               <a:t>单击此处编辑母版标题样式</a:t>
             </a:r>
+            <a:endParaRPr lang="zh-CN" altLang="en-US"/>
           </a:p>
         </p:txBody>
       </p:sp>
@@ -11274,6 +11404,7 @@
               <a:rPr lang="zh-CN" altLang="en-US"/>
               <a:t>单击此处编辑母版文本样式</a:t>
             </a:r>
+            <a:endParaRPr lang="zh-CN" altLang="en-US"/>
           </a:p>
           <a:p>
             <a:pPr lvl="1"/>
@@ -11281,6 +11412,7 @@
               <a:rPr lang="zh-CN" altLang="en-US"/>
               <a:t>第二级</a:t>
             </a:r>
+            <a:endParaRPr lang="zh-CN" altLang="en-US"/>
           </a:p>
           <a:p>
             <a:pPr lvl="2"/>
@@ -11288,6 +11420,7 @@
               <a:rPr lang="zh-CN" altLang="en-US"/>
               <a:t>第三级</a:t>
             </a:r>
+            <a:endParaRPr lang="zh-CN" altLang="en-US"/>
           </a:p>
           <a:p>
             <a:pPr lvl="3"/>
@@ -11295,6 +11428,7 @@
               <a:rPr lang="zh-CN" altLang="en-US"/>
               <a:t>第四级</a:t>
             </a:r>
+            <a:endParaRPr lang="zh-CN" altLang="en-US"/>
           </a:p>
           <a:p>
             <a:pPr lvl="4"/>
@@ -11302,6 +11436,7 @@
               <a:rPr lang="zh-CN" altLang="en-US"/>
               <a:t>第五级</a:t>
             </a:r>
+            <a:endParaRPr lang="zh-CN" altLang="en-US"/>
           </a:p>
         </p:txBody>
       </p:sp>
@@ -11340,7 +11475,6 @@
           <a:p>
             <a:fld id="{D997B5FA-0921-464F-AAE1-844C04324D75}" type="datetimeFigureOut">
               <a:rPr lang="zh-CN" altLang="en-US" smtClean="0"/>
-              <a:t>2025/4/7</a:t>
             </a:fld>
             <a:endParaRPr lang="zh-CN" altLang="en-US"/>
           </a:p>
@@ -11418,7 +11552,6 @@
           <a:p>
             <a:fld id="{565CE74E-AB26-4998-AD42-012C4C1AD076}" type="slidenum">
               <a:rPr lang="zh-CN" altLang="en-US" smtClean="0"/>
-              <a:t>‹#›</a:t>
             </a:fld>
             <a:endParaRPr lang="zh-CN" altLang="en-US"/>
           </a:p>
@@ -11470,7 +11603,7 @@
         <a:spcBef>
           <a:spcPts val="1000"/>
         </a:spcBef>
-        <a:buFont typeface="Arial" panose="020B0604020202020204" pitchFamily="34" charset="0"/>
+        <a:buFont typeface="Arial" panose="020B0604020202090204" pitchFamily="34" charset="0"/>
         <a:buChar char="•"/>
         <a:defRPr sz="2800" kern="1200">
           <a:solidFill>
@@ -11488,7 +11621,7 @@
         <a:spcBef>
           <a:spcPts val="500"/>
         </a:spcBef>
-        <a:buFont typeface="Arial" panose="020B0604020202020204" pitchFamily="34" charset="0"/>
+        <a:buFont typeface="Arial" panose="020B0604020202090204" pitchFamily="34" charset="0"/>
         <a:buChar char="•"/>
         <a:defRPr sz="2400" kern="1200">
           <a:solidFill>
@@ -11506,7 +11639,7 @@
         <a:spcBef>
           <a:spcPts val="500"/>
         </a:spcBef>
-        <a:buFont typeface="Arial" panose="020B0604020202020204" pitchFamily="34" charset="0"/>
+        <a:buFont typeface="Arial" panose="020B0604020202090204" pitchFamily="34" charset="0"/>
         <a:buChar char="•"/>
         <a:defRPr sz="2000" kern="1200">
           <a:solidFill>
@@ -11524,7 +11657,7 @@
         <a:spcBef>
           <a:spcPts val="500"/>
         </a:spcBef>
-        <a:buFont typeface="Arial" panose="020B0604020202020204" pitchFamily="34" charset="0"/>
+        <a:buFont typeface="Arial" panose="020B0604020202090204" pitchFamily="34" charset="0"/>
         <a:buChar char="•"/>
         <a:defRPr sz="1800" kern="1200">
           <a:solidFill>
@@ -11542,7 +11675,7 @@
         <a:spcBef>
           <a:spcPts val="500"/>
         </a:spcBef>
-        <a:buFont typeface="Arial" panose="020B0604020202020204" pitchFamily="34" charset="0"/>
+        <a:buFont typeface="Arial" panose="020B0604020202090204" pitchFamily="34" charset="0"/>
         <a:buChar char="•"/>
         <a:defRPr sz="1800" kern="1200">
           <a:solidFill>
@@ -11560,7 +11693,7 @@
         <a:spcBef>
           <a:spcPts val="500"/>
         </a:spcBef>
-        <a:buFont typeface="Arial" panose="020B0604020202020204" pitchFamily="34" charset="0"/>
+        <a:buFont typeface="Arial" panose="020B0604020202090204" pitchFamily="34" charset="0"/>
         <a:buChar char="•"/>
         <a:defRPr sz="1800" kern="1200">
           <a:solidFill>
@@ -11578,7 +11711,7 @@
         <a:spcBef>
           <a:spcPts val="500"/>
         </a:spcBef>
-        <a:buFont typeface="Arial" panose="020B0604020202020204" pitchFamily="34" charset="0"/>
+        <a:buFont typeface="Arial" panose="020B0604020202090204" pitchFamily="34" charset="0"/>
         <a:buChar char="•"/>
         <a:defRPr sz="1800" kern="1200">
           <a:solidFill>
@@ -11596,7 +11729,7 @@
         <a:spcBef>
           <a:spcPts val="500"/>
         </a:spcBef>
-        <a:buFont typeface="Arial" panose="020B0604020202020204" pitchFamily="34" charset="0"/>
+        <a:buFont typeface="Arial" panose="020B0604020202090204" pitchFamily="34" charset="0"/>
         <a:buChar char="•"/>
         <a:defRPr sz="1800" kern="1200">
           <a:solidFill>
@@ -11614,7 +11747,7 @@
         <a:spcBef>
           <a:spcPts val="500"/>
         </a:spcBef>
-        <a:buFont typeface="Arial" panose="020B0604020202020204" pitchFamily="34" charset="0"/>
+        <a:buFont typeface="Arial" panose="020B0604020202090204" pitchFamily="34" charset="0"/>
         <a:buChar char="•"/>
         <a:defRPr sz="1800" kern="1200">
           <a:solidFill>
@@ -11776,6 +11909,7 @@
               <a:rPr lang="zh-CN" altLang="en-US"/>
               <a:t>单击此处编辑母版标题样式</a:t>
             </a:r>
+            <a:endParaRPr lang="zh-CN" altLang="en-US"/>
           </a:p>
         </p:txBody>
       </p:sp>
@@ -11809,6 +11943,7 @@
               <a:rPr lang="zh-CN" altLang="en-US"/>
               <a:t>单击此处编辑母版文本样式</a:t>
             </a:r>
+            <a:endParaRPr lang="zh-CN" altLang="en-US"/>
           </a:p>
           <a:p>
             <a:pPr lvl="1"/>
@@ -11816,6 +11951,7 @@
               <a:rPr lang="zh-CN" altLang="en-US"/>
               <a:t>第二级</a:t>
             </a:r>
+            <a:endParaRPr lang="zh-CN" altLang="en-US"/>
           </a:p>
           <a:p>
             <a:pPr lvl="2"/>
@@ -11823,6 +11959,7 @@
               <a:rPr lang="zh-CN" altLang="en-US"/>
               <a:t>第三级</a:t>
             </a:r>
+            <a:endParaRPr lang="zh-CN" altLang="en-US"/>
           </a:p>
           <a:p>
             <a:pPr lvl="3"/>
@@ -11830,6 +11967,7 @@
               <a:rPr lang="zh-CN" altLang="en-US"/>
               <a:t>第四级</a:t>
             </a:r>
+            <a:endParaRPr lang="zh-CN" altLang="en-US"/>
           </a:p>
           <a:p>
             <a:pPr lvl="4"/>
@@ -11837,6 +11975,7 @@
               <a:rPr lang="zh-CN" altLang="en-US"/>
               <a:t>第五级</a:t>
             </a:r>
+            <a:endParaRPr lang="zh-CN" altLang="en-US"/>
           </a:p>
         </p:txBody>
       </p:sp>
@@ -11875,7 +12014,6 @@
           <a:p>
             <a:fld id="{D997B5FA-0921-464F-AAE1-844C04324D75}" type="datetimeFigureOut">
               <a:rPr lang="zh-CN" altLang="en-US" smtClean="0"/>
-              <a:t>2025/4/7</a:t>
             </a:fld>
             <a:endParaRPr lang="zh-CN" altLang="en-US"/>
           </a:p>
@@ -11953,7 +12091,6 @@
           <a:p>
             <a:fld id="{565CE74E-AB26-4998-AD42-012C4C1AD076}" type="slidenum">
               <a:rPr lang="zh-CN" altLang="en-US" smtClean="0"/>
-              <a:t>‹#›</a:t>
             </a:fld>
             <a:endParaRPr lang="zh-CN" altLang="en-US"/>
           </a:p>
@@ -12005,7 +12142,7 @@
         <a:spcBef>
           <a:spcPts val="1000"/>
         </a:spcBef>
-        <a:buFont typeface="Arial" panose="020B0604020202020204" pitchFamily="34" charset="0"/>
+        <a:buFont typeface="Arial" panose="020B0604020202090204" pitchFamily="34" charset="0"/>
         <a:buChar char="•"/>
         <a:defRPr sz="2800" kern="1200">
           <a:solidFill>
@@ -12023,7 +12160,7 @@
         <a:spcBef>
           <a:spcPts val="500"/>
         </a:spcBef>
-        <a:buFont typeface="Arial" panose="020B0604020202020204" pitchFamily="34" charset="0"/>
+        <a:buFont typeface="Arial" panose="020B0604020202090204" pitchFamily="34" charset="0"/>
         <a:buChar char="•"/>
         <a:defRPr sz="2400" kern="1200">
           <a:solidFill>
@@ -12041,7 +12178,7 @@
         <a:spcBef>
           <a:spcPts val="500"/>
         </a:spcBef>
-        <a:buFont typeface="Arial" panose="020B0604020202020204" pitchFamily="34" charset="0"/>
+        <a:buFont typeface="Arial" panose="020B0604020202090204" pitchFamily="34" charset="0"/>
         <a:buChar char="•"/>
         <a:defRPr sz="2000" kern="1200">
           <a:solidFill>
@@ -12059,7 +12196,7 @@
         <a:spcBef>
           <a:spcPts val="500"/>
         </a:spcBef>
-        <a:buFont typeface="Arial" panose="020B0604020202020204" pitchFamily="34" charset="0"/>
+        <a:buFont typeface="Arial" panose="020B0604020202090204" pitchFamily="34" charset="0"/>
         <a:buChar char="•"/>
         <a:defRPr sz="1800" kern="1200">
           <a:solidFill>
@@ -12077,7 +12214,7 @@
         <a:spcBef>
           <a:spcPts val="500"/>
         </a:spcBef>
-        <a:buFont typeface="Arial" panose="020B0604020202020204" pitchFamily="34" charset="0"/>
+        <a:buFont typeface="Arial" panose="020B0604020202090204" pitchFamily="34" charset="0"/>
         <a:buChar char="•"/>
         <a:defRPr sz="1800" kern="1200">
           <a:solidFill>
@@ -12095,7 +12232,7 @@
         <a:spcBef>
           <a:spcPts val="500"/>
         </a:spcBef>
-        <a:buFont typeface="Arial" panose="020B0604020202020204" pitchFamily="34" charset="0"/>
+        <a:buFont typeface="Arial" panose="020B0604020202090204" pitchFamily="34" charset="0"/>
         <a:buChar char="•"/>
         <a:defRPr sz="1800" kern="1200">
           <a:solidFill>
@@ -12113,7 +12250,7 @@
         <a:spcBef>
           <a:spcPts val="500"/>
         </a:spcBef>
-        <a:buFont typeface="Arial" panose="020B0604020202020204" pitchFamily="34" charset="0"/>
+        <a:buFont typeface="Arial" panose="020B0604020202090204" pitchFamily="34" charset="0"/>
         <a:buChar char="•"/>
         <a:defRPr sz="1800" kern="1200">
           <a:solidFill>
@@ -12131,7 +12268,7 @@
         <a:spcBef>
           <a:spcPts val="500"/>
         </a:spcBef>
-        <a:buFont typeface="Arial" panose="020B0604020202020204" pitchFamily="34" charset="0"/>
+        <a:buFont typeface="Arial" panose="020B0604020202090204" pitchFamily="34" charset="0"/>
         <a:buChar char="•"/>
         <a:defRPr sz="1800" kern="1200">
           <a:solidFill>
@@ -12149,7 +12286,7 @@
         <a:spcBef>
           <a:spcPts val="500"/>
         </a:spcBef>
-        <a:buFont typeface="Arial" panose="020B0604020202020204" pitchFamily="34" charset="0"/>
+        <a:buFont typeface="Arial" panose="020B0604020202090204" pitchFamily="34" charset="0"/>
         <a:buChar char="•"/>
         <a:defRPr sz="1800" kern="1200">
           <a:solidFill>
@@ -12311,6 +12448,7 @@
               <a:rPr lang="zh-CN" altLang="en-US"/>
               <a:t>单击此处编辑母版标题样式</a:t>
             </a:r>
+            <a:endParaRPr lang="zh-CN" altLang="en-US"/>
           </a:p>
         </p:txBody>
       </p:sp>
@@ -12344,6 +12482,7 @@
               <a:rPr lang="zh-CN" altLang="en-US"/>
               <a:t>单击此处编辑母版文本样式</a:t>
             </a:r>
+            <a:endParaRPr lang="zh-CN" altLang="en-US"/>
           </a:p>
           <a:p>
             <a:pPr lvl="1"/>
@@ -12351,6 +12490,7 @@
               <a:rPr lang="zh-CN" altLang="en-US"/>
               <a:t>第二级</a:t>
             </a:r>
+            <a:endParaRPr lang="zh-CN" altLang="en-US"/>
           </a:p>
           <a:p>
             <a:pPr lvl="2"/>
@@ -12358,6 +12498,7 @@
               <a:rPr lang="zh-CN" altLang="en-US"/>
               <a:t>第三级</a:t>
             </a:r>
+            <a:endParaRPr lang="zh-CN" altLang="en-US"/>
           </a:p>
           <a:p>
             <a:pPr lvl="3"/>
@@ -12365,6 +12506,7 @@
               <a:rPr lang="zh-CN" altLang="en-US"/>
               <a:t>第四级</a:t>
             </a:r>
+            <a:endParaRPr lang="zh-CN" altLang="en-US"/>
           </a:p>
           <a:p>
             <a:pPr lvl="4"/>
@@ -12372,6 +12514,7 @@
               <a:rPr lang="zh-CN" altLang="en-US"/>
               <a:t>第五级</a:t>
             </a:r>
+            <a:endParaRPr lang="zh-CN" altLang="en-US"/>
           </a:p>
         </p:txBody>
       </p:sp>
@@ -12410,7 +12553,6 @@
           <a:p>
             <a:fld id="{D997B5FA-0921-464F-AAE1-844C04324D75}" type="datetimeFigureOut">
               <a:rPr lang="zh-CN" altLang="en-US" smtClean="0"/>
-              <a:t>2025/4/7</a:t>
             </a:fld>
             <a:endParaRPr lang="zh-CN" altLang="en-US"/>
           </a:p>
@@ -12488,7 +12630,6 @@
           <a:p>
             <a:fld id="{565CE74E-AB26-4998-AD42-012C4C1AD076}" type="slidenum">
               <a:rPr lang="zh-CN" altLang="en-US" smtClean="0"/>
-              <a:t>‹#›</a:t>
             </a:fld>
             <a:endParaRPr lang="zh-CN" altLang="en-US"/>
           </a:p>
@@ -12541,7 +12682,7 @@
         <a:spcBef>
           <a:spcPts val="1000"/>
         </a:spcBef>
-        <a:buFont typeface="Arial" panose="020B0604020202020204" pitchFamily="34" charset="0"/>
+        <a:buFont typeface="Arial" panose="020B0604020202090204" pitchFamily="34" charset="0"/>
         <a:buChar char="•"/>
         <a:defRPr sz="2800" kern="1200">
           <a:solidFill>
@@ -12559,7 +12700,7 @@
         <a:spcBef>
           <a:spcPts val="500"/>
         </a:spcBef>
-        <a:buFont typeface="Arial" panose="020B0604020202020204" pitchFamily="34" charset="0"/>
+        <a:buFont typeface="Arial" panose="020B0604020202090204" pitchFamily="34" charset="0"/>
         <a:buChar char="•"/>
         <a:defRPr sz="2400" kern="1200">
           <a:solidFill>
@@ -12577,7 +12718,7 @@
         <a:spcBef>
           <a:spcPts val="500"/>
         </a:spcBef>
-        <a:buFont typeface="Arial" panose="020B0604020202020204" pitchFamily="34" charset="0"/>
+        <a:buFont typeface="Arial" panose="020B0604020202090204" pitchFamily="34" charset="0"/>
         <a:buChar char="•"/>
         <a:defRPr sz="2000" kern="1200">
           <a:solidFill>
@@ -12595,7 +12736,7 @@
         <a:spcBef>
           <a:spcPts val="500"/>
         </a:spcBef>
-        <a:buFont typeface="Arial" panose="020B0604020202020204" pitchFamily="34" charset="0"/>
+        <a:buFont typeface="Arial" panose="020B0604020202090204" pitchFamily="34" charset="0"/>
         <a:buChar char="•"/>
         <a:defRPr sz="1800" kern="1200">
           <a:solidFill>
@@ -12613,7 +12754,7 @@
         <a:spcBef>
           <a:spcPts val="500"/>
         </a:spcBef>
-        <a:buFont typeface="Arial" panose="020B0604020202020204" pitchFamily="34" charset="0"/>
+        <a:buFont typeface="Arial" panose="020B0604020202090204" pitchFamily="34" charset="0"/>
         <a:buChar char="•"/>
         <a:defRPr sz="1800" kern="1200">
           <a:solidFill>
@@ -12631,7 +12772,7 @@
         <a:spcBef>
           <a:spcPts val="500"/>
         </a:spcBef>
-        <a:buFont typeface="Arial" panose="020B0604020202020204" pitchFamily="34" charset="0"/>
+        <a:buFont typeface="Arial" panose="020B0604020202090204" pitchFamily="34" charset="0"/>
         <a:buChar char="•"/>
         <a:defRPr sz="1800" kern="1200">
           <a:solidFill>
@@ -12649,7 +12790,7 @@
         <a:spcBef>
           <a:spcPts val="500"/>
         </a:spcBef>
-        <a:buFont typeface="Arial" panose="020B0604020202020204" pitchFamily="34" charset="0"/>
+        <a:buFont typeface="Arial" panose="020B0604020202090204" pitchFamily="34" charset="0"/>
         <a:buChar char="•"/>
         <a:defRPr sz="1800" kern="1200">
           <a:solidFill>
@@ -12667,7 +12808,7 @@
         <a:spcBef>
           <a:spcPts val="500"/>
         </a:spcBef>
-        <a:buFont typeface="Arial" panose="020B0604020202020204" pitchFamily="34" charset="0"/>
+        <a:buFont typeface="Arial" panose="020B0604020202090204" pitchFamily="34" charset="0"/>
         <a:buChar char="•"/>
         <a:defRPr sz="1800" kern="1200">
           <a:solidFill>
@@ -12685,7 +12826,7 @@
         <a:spcBef>
           <a:spcPts val="500"/>
         </a:spcBef>
-        <a:buFont typeface="Arial" panose="020B0604020202020204" pitchFamily="34" charset="0"/>
+        <a:buFont typeface="Arial" panose="020B0604020202090204" pitchFamily="34" charset="0"/>
         <a:buChar char="•"/>
         <a:defRPr sz="1800" kern="1200">
           <a:solidFill>
@@ -12841,12 +12982,20 @@
                 <a:solidFill>
                   <a:srgbClr val="2E0158"/>
                 </a:solidFill>
-                <a:latin typeface="Times New Roman" panose="02020603050405020304" charset="0"/>
-                <a:ea typeface="Times New Roman" panose="02020603050405020304" charset="0"/>
-                <a:cs typeface="Times New Roman" panose="02020603050405020304" charset="0"/>
+                <a:latin typeface="Times New Roman" panose="02020503050405090304" charset="0"/>
+                <a:ea typeface="Times New Roman" panose="02020503050405090304" charset="0"/>
+                <a:cs typeface="Times New Roman" panose="02020503050405090304" charset="0"/>
               </a:rPr>
               <a:t>CSC 1004: Tutorial 9 </a:t>
             </a:r>
+            <a:endParaRPr lang="en-US" sz="3665" b="1" dirty="0">
+              <a:solidFill>
+                <a:srgbClr val="2E0158"/>
+              </a:solidFill>
+              <a:latin typeface="Times New Roman" panose="02020503050405090304" charset="0"/>
+              <a:ea typeface="Times New Roman" panose="02020503050405090304" charset="0"/>
+              <a:cs typeface="Times New Roman" panose="02020503050405090304" charset="0"/>
+            </a:endParaRPr>
           </a:p>
           <a:p>
             <a:pPr marL="0" indent="0" algn="ctr">
@@ -12857,13 +13006,22 @@
                 <a:solidFill>
                   <a:srgbClr val="2E0158"/>
                 </a:solidFill>
-                <a:latin typeface="Times New Roman" panose="02020603050405020304" charset="0"/>
-                <a:ea typeface="Times New Roman" panose="02020603050405020304" charset="0"/>
-                <a:cs typeface="Times New Roman" panose="02020603050405020304" charset="0"/>
+                <a:latin typeface="Times New Roman" panose="02020503050405090304" charset="0"/>
+                <a:ea typeface="Times New Roman" panose="02020503050405090304" charset="0"/>
+                <a:cs typeface="Times New Roman" panose="02020503050405090304" charset="0"/>
                 <a:sym typeface="+mn-ea"/>
               </a:rPr>
-              <a:t>Basic Program Implement</a:t>
-            </a:r>
+              <a:t>Basic Program Implementation</a:t>
+            </a:r>
+            <a:endParaRPr lang="en-US" sz="3665" b="1" dirty="0">
+              <a:solidFill>
+                <a:srgbClr val="2E0158"/>
+              </a:solidFill>
+              <a:latin typeface="Times New Roman" panose="02020503050405090304" charset="0"/>
+              <a:ea typeface="Times New Roman" panose="02020503050405090304" charset="0"/>
+              <a:cs typeface="Times New Roman" panose="02020503050405090304" charset="0"/>
+              <a:sym typeface="+mn-ea"/>
+            </a:endParaRPr>
           </a:p>
         </p:txBody>
       </p:sp>
@@ -12895,19 +13053,19 @@
                 <a:solidFill>
                   <a:srgbClr val="646464"/>
                 </a:solidFill>
-                <a:latin typeface="Times New Roman" panose="02020603050405020304" charset="0"/>
-                <a:ea typeface="Times New Roman" panose="02020603050405020304" charset="0"/>
-                <a:cs typeface="Times New Roman" panose="02020603050405020304" charset="0"/>
+                <a:latin typeface="Times New Roman" panose="02020503050405090304" charset="0"/>
+                <a:ea typeface="Times New Roman" panose="02020503050405090304" charset="0"/>
+                <a:cs typeface="Times New Roman" panose="02020503050405090304" charset="0"/>
               </a:rPr>
-              <a:t> Guanren Qiao</a:t>
+              <a:t> Bo Yue</a:t>
             </a:r>
             <a:endParaRPr lang="en-US" sz="2665" dirty="0">
               <a:solidFill>
                 <a:srgbClr val="646464"/>
               </a:solidFill>
-              <a:latin typeface="Times New Roman" panose="02020603050405020304" charset="0"/>
-              <a:ea typeface="Times New Roman" panose="02020603050405020304" charset="0"/>
-              <a:cs typeface="Times New Roman" panose="02020603050405020304" charset="0"/>
+              <a:latin typeface="Times New Roman" panose="02020503050405090304" charset="0"/>
+              <a:ea typeface="Times New Roman" panose="02020503050405090304" charset="0"/>
+              <a:cs typeface="Times New Roman" panose="02020503050405090304" charset="0"/>
             </a:endParaRPr>
           </a:p>
           <a:p>
@@ -12919,12 +13077,20 @@
                 <a:solidFill>
                   <a:srgbClr val="646464"/>
                 </a:solidFill>
-                <a:latin typeface="Times New Roman" panose="02020603050405020304" charset="0"/>
-                <a:ea typeface="Times New Roman" panose="02020603050405020304" charset="0"/>
-                <a:cs typeface="Times New Roman" panose="02020603050405020304" charset="0"/>
+                <a:latin typeface="Times New Roman" panose="02020503050405090304" charset="0"/>
+                <a:ea typeface="Times New Roman" panose="02020503050405090304" charset="0"/>
+                <a:cs typeface="Times New Roman" panose="02020503050405090304" charset="0"/>
               </a:rPr>
               <a:t>SDS, CUHK-SZ</a:t>
             </a:r>
+            <a:endParaRPr lang="en-US" sz="2665" dirty="0">
+              <a:solidFill>
+                <a:srgbClr val="646464"/>
+              </a:solidFill>
+              <a:latin typeface="Times New Roman" panose="02020503050405090304" charset="0"/>
+              <a:ea typeface="Times New Roman" panose="02020503050405090304" charset="0"/>
+              <a:cs typeface="Times New Roman" panose="02020503050405090304" charset="0"/>
+            </a:endParaRPr>
           </a:p>
         </p:txBody>
       </p:sp>
@@ -12937,7 +13103,7 @@
           <p:nvPr/>
         </p:nvPicPr>
         <p:blipFill>
-          <a:blip r:embed="rId3"/>
+          <a:blip r:embed="rId1"/>
           <a:stretch>
             <a:fillRect/>
           </a:stretch>
@@ -13005,13 +13171,22 @@
                 <a:solidFill>
                   <a:srgbClr val="2E0158"/>
                 </a:solidFill>
-                <a:latin typeface="Times New Roman" panose="02020603050405020304" charset="0"/>
-                <a:ea typeface="Times New Roman" panose="02020603050405020304" charset="0"/>
-                <a:cs typeface="Times New Roman" panose="02020603050405020304" charset="0"/>
+                <a:latin typeface="Times New Roman" panose="02020503050405090304" charset="0"/>
+                <a:ea typeface="Times New Roman" panose="02020503050405090304" charset="0"/>
+                <a:cs typeface="Times New Roman" panose="02020503050405090304" charset="0"/>
                 <a:sym typeface="+mn-ea"/>
               </a:rPr>
               <a:t>Review</a:t>
             </a:r>
+            <a:endParaRPr lang="en-US" sz="3200" b="1" dirty="0">
+              <a:solidFill>
+                <a:srgbClr val="2E0158"/>
+              </a:solidFill>
+              <a:latin typeface="Times New Roman" panose="02020503050405090304" charset="0"/>
+              <a:ea typeface="Times New Roman" panose="02020503050405090304" charset="0"/>
+              <a:cs typeface="Times New Roman" panose="02020503050405090304" charset="0"/>
+              <a:sym typeface="+mn-ea"/>
+            </a:endParaRPr>
           </a:p>
         </p:txBody>
       </p:sp>
@@ -13046,9 +13221,9 @@
               <a:solidFill>
                 <a:schemeClr val="tx1"/>
               </a:solidFill>
-              <a:latin typeface="Times New Roman" panose="02020603050405020304" charset="0"/>
-              <a:ea typeface="Times New Roman" panose="02020603050405020304" charset="0"/>
-              <a:cs typeface="Times New Roman" panose="02020603050405020304" charset="0"/>
+              <a:latin typeface="Times New Roman" panose="02020503050405090304" charset="0"/>
+              <a:ea typeface="Times New Roman" panose="02020503050405090304" charset="0"/>
+              <a:cs typeface="Times New Roman" panose="02020503050405090304" charset="0"/>
               <a:sym typeface="+mn-ea"/>
             </a:endParaRPr>
           </a:p>
@@ -13067,7 +13242,7 @@
           </p:nvPr>
         </p:nvPicPr>
         <p:blipFill>
-          <a:blip r:embed="rId4"/>
+          <a:blip r:embed="rId2"/>
           <a:stretch>
             <a:fillRect/>
           </a:stretch>
@@ -13091,7 +13266,7 @@
           <p:nvPr/>
         </p:nvPicPr>
         <p:blipFill>
-          <a:blip r:embed="rId5"/>
+          <a:blip r:embed="rId3"/>
           <a:srcRect l="12310" t="24313" r="9391" b="11190"/>
           <a:stretch>
             <a:fillRect/>
@@ -13160,41 +13335,41 @@
                 <a:solidFill>
                   <a:srgbClr val="2E0158"/>
                 </a:solidFill>
-                <a:latin typeface="Times New Roman" panose="02020603050405020304" charset="0"/>
-                <a:ea typeface="Times New Roman" panose="02020603050405020304" charset="0"/>
-                <a:cs typeface="Times New Roman" panose="02020603050405020304" charset="0"/>
+                <a:latin typeface="Times New Roman" panose="02020503050405090304" charset="0"/>
+                <a:ea typeface="Times New Roman" panose="02020503050405090304" charset="0"/>
+                <a:cs typeface="Times New Roman" panose="02020503050405090304" charset="0"/>
                 <a:sym typeface="+mn-ea"/>
               </a:rPr>
               <a:t>Class </a:t>
             </a:r>
             <a:r>
               <a:rPr lang="en-US" altLang="zh-CN" sz="3200" b="1">
-                <a:latin typeface="Times New Roman" panose="02020603050405020304" charset="0"/>
-                <a:cs typeface="Times New Roman" panose="02020603050405020304" charset="0"/>
+                <a:latin typeface="Times New Roman" panose="02020503050405090304" charset="0"/>
+                <a:cs typeface="Times New Roman" panose="02020503050405090304" charset="0"/>
                 <a:sym typeface="+mn-ea"/>
               </a:rPr>
               <a:t>SnakeGame and </a:t>
             </a:r>
             <a:r>
               <a:rPr lang="zh-CN" altLang="en-US" sz="3200" b="1">
-                <a:latin typeface="Times New Roman" panose="02020603050405020304" charset="0"/>
-                <a:cs typeface="Times New Roman" panose="02020603050405020304" charset="0"/>
+                <a:latin typeface="Times New Roman" panose="02020503050405090304" charset="0"/>
+                <a:cs typeface="Times New Roman" panose="02020503050405090304" charset="0"/>
                 <a:sym typeface="+mn-ea"/>
               </a:rPr>
               <a:t>start_game</a:t>
             </a:r>
             <a:r>
               <a:rPr lang="en-US" altLang="zh-CN" sz="3200" b="1">
-                <a:latin typeface="Times New Roman" panose="02020603050405020304" charset="0"/>
-                <a:cs typeface="Times New Roman" panose="02020603050405020304" charset="0"/>
+                <a:latin typeface="Times New Roman" panose="02020503050405090304" charset="0"/>
+                <a:cs typeface="Times New Roman" panose="02020503050405090304" charset="0"/>
                 <a:sym typeface="+mn-ea"/>
               </a:rPr>
               <a:t> function</a:t>
             </a:r>
             <a:r>
               <a:rPr lang="en-US" altLang="zh-CN" sz="3200">
-                <a:latin typeface="Times New Roman" panose="02020603050405020304" charset="0"/>
-                <a:cs typeface="Times New Roman" panose="02020603050405020304" charset="0"/>
+                <a:latin typeface="Times New Roman" panose="02020503050405090304" charset="0"/>
+                <a:cs typeface="Times New Roman" panose="02020503050405090304" charset="0"/>
                 <a:sym typeface="+mn-ea"/>
               </a:rPr>
               <a:t> </a:t>
@@ -13204,13 +13379,22 @@
                 <a:solidFill>
                   <a:srgbClr val="2E0158"/>
                 </a:solidFill>
-                <a:latin typeface="Times New Roman" panose="02020603050405020304" charset="0"/>
-                <a:ea typeface="Times New Roman" panose="02020603050405020304" charset="0"/>
-                <a:cs typeface="Times New Roman" panose="02020603050405020304" charset="0"/>
+                <a:latin typeface="Times New Roman" panose="02020503050405090304" charset="0"/>
+                <a:ea typeface="Times New Roman" panose="02020503050405090304" charset="0"/>
+                <a:cs typeface="Times New Roman" panose="02020503050405090304" charset="0"/>
                 <a:sym typeface="+mn-ea"/>
               </a:rPr>
               <a:t> </a:t>
             </a:r>
+            <a:endParaRPr lang="en-US" sz="3200" b="1" dirty="0">
+              <a:solidFill>
+                <a:srgbClr val="2E0158"/>
+              </a:solidFill>
+              <a:latin typeface="Times New Roman" panose="02020503050405090304" charset="0"/>
+              <a:ea typeface="Times New Roman" panose="02020503050405090304" charset="0"/>
+              <a:cs typeface="Times New Roman" panose="02020503050405090304" charset="0"/>
+              <a:sym typeface="+mn-ea"/>
+            </a:endParaRPr>
           </a:p>
         </p:txBody>
       </p:sp>
@@ -13245,9 +13429,9 @@
               <a:solidFill>
                 <a:schemeClr val="tx1"/>
               </a:solidFill>
-              <a:latin typeface="Times New Roman" panose="02020603050405020304" charset="0"/>
-              <a:ea typeface="Times New Roman" panose="02020603050405020304" charset="0"/>
-              <a:cs typeface="Times New Roman" panose="02020603050405020304" charset="0"/>
+              <a:latin typeface="Times New Roman" panose="02020503050405090304" charset="0"/>
+              <a:ea typeface="Times New Roman" panose="02020503050405090304" charset="0"/>
+              <a:cs typeface="Times New Roman" panose="02020503050405090304" charset="0"/>
               <a:sym typeface="+mn-ea"/>
             </a:endParaRPr>
           </a:p>
@@ -13263,9 +13447,9 @@
               <a:solidFill>
                 <a:schemeClr val="tx1"/>
               </a:solidFill>
-              <a:latin typeface="Times New Roman" panose="02020603050405020304" charset="0"/>
-              <a:ea typeface="Times New Roman" panose="02020603050405020304" charset="0"/>
-              <a:cs typeface="Times New Roman" panose="02020603050405020304" charset="0"/>
+              <a:latin typeface="Times New Roman" panose="02020503050405090304" charset="0"/>
+              <a:ea typeface="Times New Roman" panose="02020503050405090304" charset="0"/>
+              <a:cs typeface="Times New Roman" panose="02020503050405090304" charset="0"/>
               <a:sym typeface="+mn-ea"/>
             </a:endParaRPr>
           </a:p>
@@ -13284,7 +13468,7 @@
           </p:nvPr>
         </p:nvPicPr>
         <p:blipFill>
-          <a:blip r:embed="rId4"/>
+          <a:blip r:embed="rId2"/>
           <a:stretch>
             <a:fillRect/>
           </a:stretch>
@@ -13325,90 +13509,105 @@
               <a:rPr lang="en-US" altLang="zh-CN"/>
               <a:t> class SnakeGame(tk.Tk):                                                                     </a:t>
             </a:r>
+            <a:endParaRPr lang="en-US" altLang="zh-CN"/>
           </a:p>
           <a:p>
             <a:r>
               <a:rPr lang="en-US" altLang="zh-CN"/>
               <a:t>    def __init__(self):</a:t>
             </a:r>
+            <a:endParaRPr lang="en-US" altLang="zh-CN"/>
           </a:p>
           <a:p>
             <a:r>
               <a:rPr lang="en-US" altLang="zh-CN"/>
               <a:t>        super().__init__()</a:t>
             </a:r>
+            <a:endParaRPr lang="en-US" altLang="zh-CN"/>
           </a:p>
           <a:p>
             <a:r>
               <a:rPr lang="en-US" altLang="zh-CN"/>
               <a:t>        self.title("Snake Game")</a:t>
             </a:r>
+            <a:endParaRPr lang="en-US" altLang="zh-CN"/>
           </a:p>
           <a:p>
             <a:r>
               <a:rPr lang="en-US" altLang="zh-CN"/>
               <a:t>        self.geometry("800x800")</a:t>
             </a:r>
+            <a:endParaRPr lang="en-US" altLang="zh-CN"/>
           </a:p>
           <a:p>
             <a:r>
               <a:rPr lang="en-US" altLang="zh-CN"/>
               <a:t>        self.resizable(False, False)</a:t>
             </a:r>
+            <a:endParaRPr lang="en-US" altLang="zh-CN"/>
           </a:p>
           <a:p>
             <a:r>
               <a:rPr lang="en-US" altLang="zh-CN"/>
               <a:t>        self.width = 800</a:t>
             </a:r>
+            <a:endParaRPr lang="en-US" altLang="zh-CN"/>
           </a:p>
           <a:p>
             <a:r>
               <a:rPr lang="en-US" altLang="zh-CN"/>
               <a:t>        self.height = 800</a:t>
             </a:r>
+            <a:endParaRPr lang="en-US" altLang="zh-CN"/>
           </a:p>
           <a:p>
             <a:r>
               <a:rPr lang="en-US" altLang="zh-CN"/>
               <a:t>        self.cell_size = 20</a:t>
             </a:r>
+            <a:endParaRPr lang="en-US" altLang="zh-CN"/>
           </a:p>
           <a:p>
             <a:r>
               <a:rPr lang="en-US" altLang="zh-CN"/>
               <a:t>        self.snake_direction = 'Right'</a:t>
             </a:r>
+            <a:endParaRPr lang="en-US" altLang="zh-CN"/>
           </a:p>
           <a:p>
             <a:r>
               <a:rPr lang="en-US" altLang="zh-CN"/>
               <a:t>        self.snake = [(100, 100), (80, 100), (60, 100)]</a:t>
             </a:r>
+            <a:endParaRPr lang="en-US" altLang="zh-CN"/>
           </a:p>
           <a:p>
             <a:r>
               <a:rPr lang="en-US" altLang="zh-CN"/>
               <a:t>        self.food = self.create_food()</a:t>
             </a:r>
+            <a:endParaRPr lang="en-US" altLang="zh-CN"/>
           </a:p>
           <a:p>
             <a:r>
               <a:rPr lang="en-US" altLang="zh-CN"/>
               <a:t>        self.game_frame = tk.Frame(self)</a:t>
             </a:r>
+            <a:endParaRPr lang="en-US" altLang="zh-CN"/>
           </a:p>
           <a:p>
             <a:r>
               <a:rPr lang="en-US" altLang="zh-CN"/>
               <a:t>        self.canvas = tk.Canvas(self.game_frame, bg='black', width=self.width, height=self.height)</a:t>
             </a:r>
+            <a:endParaRPr lang="en-US" altLang="zh-CN"/>
           </a:p>
           <a:p>
             <a:r>
               <a:rPr lang="en-US" altLang="zh-CN"/>
               <a:t>        self.start_game()</a:t>
             </a:r>
+            <a:endParaRPr lang="en-US" altLang="zh-CN"/>
           </a:p>
         </p:txBody>
       </p:sp>
@@ -13438,30 +13637,35 @@
               <a:rPr lang="zh-CN" altLang="en-US"/>
               <a:t>    def start_game(self):</a:t>
             </a:r>
+            <a:endParaRPr lang="zh-CN" altLang="en-US"/>
           </a:p>
           <a:p>
             <a:r>
               <a:rPr lang="zh-CN" altLang="en-US"/>
               <a:t>        self.game_frame.pack(fill="both", expand=True)</a:t>
             </a:r>
+            <a:endParaRPr lang="zh-CN" altLang="en-US"/>
           </a:p>
           <a:p>
             <a:r>
               <a:rPr lang="zh-CN" altLang="en-US"/>
               <a:t>        self.canvas.pack()</a:t>
             </a:r>
+            <a:endParaRPr lang="zh-CN" altLang="en-US"/>
           </a:p>
           <a:p>
             <a:r>
               <a:rPr lang="zh-CN" altLang="en-US"/>
               <a:t>        self.setup_ui()</a:t>
             </a:r>
+            <a:endParaRPr lang="zh-CN" altLang="en-US"/>
           </a:p>
           <a:p>
             <a:r>
               <a:rPr lang="zh-CN" altLang="en-US"/>
               <a:t>        self.run_game()</a:t>
             </a:r>
+            <a:endParaRPr lang="zh-CN" altLang="en-US"/>
           </a:p>
         </p:txBody>
       </p:sp>
@@ -13565,18 +13769,21 @@
               <a:rPr lang="en-US" altLang="zh-CN"/>
               <a:t>     def setup_ui(self):</a:t>
             </a:r>
+            <a:endParaRPr lang="en-US" altLang="zh-CN"/>
           </a:p>
           <a:p>
             <a:r>
               <a:rPr lang="en-US" altLang="zh-CN"/>
               <a:t>        self.update_ui()</a:t>
             </a:r>
+            <a:endParaRPr lang="en-US" altLang="zh-CN"/>
           </a:p>
           <a:p>
             <a:r>
               <a:rPr lang="en-US" altLang="zh-CN"/>
               <a:t>        self.bind("&lt;KeyPress&gt;", self.change_direction)</a:t>
             </a:r>
+            <a:endParaRPr lang="en-US" altLang="zh-CN"/>
           </a:p>
         </p:txBody>
       </p:sp>
@@ -13680,18 +13887,21 @@
               <a:rPr lang="zh-CN" altLang="en-US"/>
               <a:t>    def run_game(self):</a:t>
             </a:r>
+            <a:endParaRPr lang="zh-CN" altLang="en-US"/>
           </a:p>
           <a:p>
             <a:r>
               <a:rPr lang="zh-CN" altLang="en-US"/>
               <a:t>        self.move_snake()</a:t>
             </a:r>
+            <a:endParaRPr lang="zh-CN" altLang="en-US"/>
           </a:p>
           <a:p>
             <a:r>
               <a:rPr lang="zh-CN" altLang="en-US"/>
               <a:t>        self.after(100, self.run_game)</a:t>
             </a:r>
+            <a:endParaRPr lang="zh-CN" altLang="en-US"/>
           </a:p>
         </p:txBody>
       </p:sp>
@@ -13825,13 +14035,22 @@
                 <a:solidFill>
                   <a:srgbClr val="2E0158"/>
                 </a:solidFill>
-                <a:latin typeface="Times New Roman" panose="02020603050405020304" charset="0"/>
-                <a:ea typeface="Times New Roman" panose="02020603050405020304" charset="0"/>
-                <a:cs typeface="Times New Roman" panose="02020603050405020304" charset="0"/>
+                <a:latin typeface="Times New Roman" panose="02020503050405090304" charset="0"/>
+                <a:ea typeface="Times New Roman" panose="02020503050405090304" charset="0"/>
+                <a:cs typeface="Times New Roman" panose="02020503050405090304" charset="0"/>
                 <a:sym typeface="+mn-ea"/>
               </a:rPr>
               <a:t>Create food and game over</a:t>
             </a:r>
+            <a:endParaRPr lang="en-US" sz="3200" b="1" dirty="0">
+              <a:solidFill>
+                <a:srgbClr val="2E0158"/>
+              </a:solidFill>
+              <a:latin typeface="Times New Roman" panose="02020503050405090304" charset="0"/>
+              <a:ea typeface="Times New Roman" panose="02020503050405090304" charset="0"/>
+              <a:cs typeface="Times New Roman" panose="02020503050405090304" charset="0"/>
+              <a:sym typeface="+mn-ea"/>
+            </a:endParaRPr>
           </a:p>
         </p:txBody>
       </p:sp>
@@ -13964,6 +14183,9 @@
               </a:rPr>
               <a:t>                return food</a:t>
             </a:r>
+            <a:endParaRPr lang="zh-CN" altLang="en-US" sz="2400">
+              <a:sym typeface="+mn-ea"/>
+            </a:endParaRPr>
           </a:p>
           <a:p>
             <a:pPr marL="342900" indent="-342900" algn="l" fontAlgn="auto">
@@ -13977,9 +14199,9 @@
               <a:solidFill>
                 <a:schemeClr val="tx1"/>
               </a:solidFill>
-              <a:latin typeface="Times New Roman" panose="02020603050405020304" charset="0"/>
-              <a:ea typeface="Times New Roman" panose="02020603050405020304" charset="0"/>
-              <a:cs typeface="Times New Roman" panose="02020603050405020304" charset="0"/>
+              <a:latin typeface="Times New Roman" panose="02020503050405090304" charset="0"/>
+              <a:ea typeface="Times New Roman" panose="02020503050405090304" charset="0"/>
+              <a:cs typeface="Times New Roman" panose="02020503050405090304" charset="0"/>
               <a:sym typeface="+mn-ea"/>
             </a:endParaRPr>
           </a:p>
@@ -14043,9 +14265,9 @@
               <a:solidFill>
                 <a:schemeClr val="tx1"/>
               </a:solidFill>
-              <a:latin typeface="Times New Roman" panose="02020603050405020304" charset="0"/>
-              <a:ea typeface="Times New Roman" panose="02020603050405020304" charset="0"/>
-              <a:cs typeface="Times New Roman" panose="02020603050405020304" charset="0"/>
+              <a:latin typeface="Times New Roman" panose="02020503050405090304" charset="0"/>
+              <a:ea typeface="Times New Roman" panose="02020503050405090304" charset="0"/>
+              <a:cs typeface="Times New Roman" panose="02020503050405090304" charset="0"/>
               <a:sym typeface="+mn-ea"/>
             </a:endParaRPr>
           </a:p>
@@ -14064,7 +14286,7 @@
           </p:nvPr>
         </p:nvPicPr>
         <p:blipFill>
-          <a:blip r:embed="rId4"/>
+          <a:blip r:embed="rId2"/>
           <a:stretch>
             <a:fillRect/>
           </a:stretch>
@@ -14131,9 +14353,9 @@
               <a:solidFill>
                 <a:schemeClr val="tx1"/>
               </a:solidFill>
-              <a:latin typeface="Times New Roman" panose="02020603050405020304" charset="0"/>
-              <a:ea typeface="Times New Roman" panose="02020603050405020304" charset="0"/>
-              <a:cs typeface="Times New Roman" panose="02020603050405020304" charset="0"/>
+              <a:latin typeface="Times New Roman" panose="02020503050405090304" charset="0"/>
+              <a:ea typeface="Times New Roman" panose="02020503050405090304" charset="0"/>
+              <a:cs typeface="Times New Roman" panose="02020503050405090304" charset="0"/>
               <a:sym typeface="+mn-ea"/>
             </a:endParaRPr>
           </a:p>
@@ -14151,8 +14373,8 @@
               <a:solidFill>
                 <a:schemeClr val="tx1"/>
               </a:solidFill>
-              <a:latin typeface="Times New Roman" panose="02020603050405020304" charset="0"/>
-              <a:cs typeface="Times New Roman" panose="02020603050405020304" charset="0"/>
+              <a:latin typeface="Times New Roman" panose="02020503050405090304" charset="0"/>
+              <a:cs typeface="Times New Roman" panose="02020503050405090304" charset="0"/>
             </a:endParaRPr>
           </a:p>
           <a:p>
@@ -14163,8 +14385,8 @@
               <a:solidFill>
                 <a:schemeClr val="tx1"/>
               </a:solidFill>
-              <a:latin typeface="Times New Roman" panose="02020603050405020304" charset="0"/>
-              <a:cs typeface="Times New Roman" panose="02020603050405020304" charset="0"/>
+              <a:latin typeface="Times New Roman" panose="02020503050405090304" charset="0"/>
+              <a:cs typeface="Times New Roman" panose="02020503050405090304" charset="0"/>
             </a:endParaRPr>
           </a:p>
         </p:txBody>
@@ -14200,8 +14422,8 @@
               <a:solidFill>
                 <a:schemeClr val="tx1"/>
               </a:solidFill>
-              <a:latin typeface="Times New Roman" panose="02020603050405020304" charset="0"/>
-              <a:cs typeface="Times New Roman" panose="02020603050405020304" charset="0"/>
+              <a:latin typeface="Times New Roman" panose="02020503050405090304" charset="0"/>
+              <a:cs typeface="Times New Roman" panose="02020503050405090304" charset="0"/>
             </a:endParaRPr>
           </a:p>
         </p:txBody>
@@ -14219,7 +14441,7 @@
           </p:nvPr>
         </p:nvPicPr>
         <p:blipFill>
-          <a:blip r:embed="rId4"/>
+          <a:blip r:embed="rId2"/>
           <a:stretch>
             <a:fillRect/>
           </a:stretch>
@@ -14260,36 +14482,42 @@
               <a:rPr lang="en-US" altLang="zh-CN" sz="2400"/>
               <a:t>    def update_ui(self):</a:t>
             </a:r>
+            <a:endParaRPr lang="en-US" altLang="zh-CN" sz="2400"/>
           </a:p>
           <a:p>
             <a:r>
               <a:rPr lang="en-US" altLang="zh-CN" sz="2400"/>
               <a:t>        self.canvas.delete('all')</a:t>
             </a:r>
+            <a:endParaRPr lang="en-US" altLang="zh-CN" sz="2400"/>
           </a:p>
           <a:p>
             <a:r>
               <a:rPr lang="en-US" altLang="zh-CN" sz="2400"/>
               <a:t>        for x, y in self.snake:</a:t>
             </a:r>
+            <a:endParaRPr lang="en-US" altLang="zh-CN" sz="2400"/>
           </a:p>
           <a:p>
             <a:r>
               <a:rPr lang="en-US" altLang="zh-CN" sz="2400"/>
               <a:t>            self.canvas.create_rectangle(x, y, x + self.cell_size, y + self.cell_size, fill='green')</a:t>
             </a:r>
+            <a:endParaRPr lang="en-US" altLang="zh-CN" sz="2400"/>
           </a:p>
           <a:p>
             <a:r>
               <a:rPr lang="en-US" altLang="zh-CN" sz="2400"/>
               <a:t>   </a:t>
             </a:r>
+            <a:endParaRPr lang="en-US" altLang="zh-CN" sz="2400"/>
           </a:p>
           <a:p>
             <a:r>
               <a:rPr lang="en-US" altLang="zh-CN" sz="2400"/>
               <a:t>    the update of food state is the same as the snake, and you can finish it by yourself.</a:t>
             </a:r>
+            <a:endParaRPr lang="en-US" altLang="zh-CN" sz="2400"/>
           </a:p>
           <a:p>
             <a:endParaRPr lang="en-US" altLang="zh-CN" sz="2400"/>
@@ -14357,9 +14585,9 @@
               <a:solidFill>
                 <a:srgbClr val="2E0158"/>
               </a:solidFill>
-              <a:latin typeface="Times New Roman" panose="02020603050405020304" charset="0"/>
-              <a:ea typeface="宋体" panose="02010600030101010101" pitchFamily="2" charset="-122"/>
-              <a:cs typeface="Times New Roman" panose="02020603050405020304" charset="0"/>
+              <a:latin typeface="Times New Roman" panose="02020503050405090304" charset="0"/>
+              <a:ea typeface="宋体" pitchFamily="2" charset="-122"/>
+              <a:cs typeface="Times New Roman" panose="02020503050405090304" charset="0"/>
             </a:endParaRPr>
           </a:p>
         </p:txBody>
@@ -14395,9 +14623,9 @@
               <a:solidFill>
                 <a:srgbClr val="383838"/>
               </a:solidFill>
-              <a:latin typeface="Times New Roman" panose="02020603050405020304" charset="0"/>
-              <a:ea typeface="Times New Roman" panose="02020603050405020304" charset="0"/>
-              <a:cs typeface="Times New Roman" panose="02020603050405020304" charset="0"/>
+              <a:latin typeface="Times New Roman" panose="02020503050405090304" charset="0"/>
+              <a:ea typeface="Times New Roman" panose="02020503050405090304" charset="0"/>
+              <a:cs typeface="Times New Roman" panose="02020503050405090304" charset="0"/>
             </a:endParaRPr>
           </a:p>
         </p:txBody>
@@ -14415,7 +14643,7 @@
           </p:nvPr>
         </p:nvPicPr>
         <p:blipFill>
-          <a:blip r:embed="rId4"/>
+          <a:blip r:embed="rId2"/>
           <a:stretch>
             <a:fillRect/>
           </a:stretch>
@@ -14456,36 +14684,42 @@
               <a:rPr sz="2400"/>
               <a:t>    def change_direction(self, event):</a:t>
             </a:r>
+            <a:endParaRPr sz="2400"/>
           </a:p>
           <a:p>
             <a:r>
               <a:rPr sz="2400"/>
               <a:t>        opposite_directions = {'Left': 'Right', 'Right': 'Left', 'Up': 'Down', 'Down': 'Up'}</a:t>
             </a:r>
+            <a:endParaRPr sz="2400"/>
           </a:p>
           <a:p>
             <a:r>
               <a:rPr sz="2400"/>
               <a:t>        if event.keysym in ['Left', 'Right', 'Up', 'Down']:</a:t>
             </a:r>
+            <a:endParaRPr sz="2400"/>
           </a:p>
           <a:p>
             <a:r>
               <a:rPr sz="2400"/>
               <a:t>            # Check if the new direction is opposite to the current direction</a:t>
             </a:r>
+            <a:endParaRPr sz="2400"/>
           </a:p>
           <a:p>
             <a:r>
               <a:rPr sz="2400"/>
               <a:t>            if event.keysym != opposite_directions[self.snake_direction]:</a:t>
             </a:r>
+            <a:endParaRPr sz="2400"/>
           </a:p>
           <a:p>
             <a:r>
               <a:rPr sz="2400"/>
               <a:t>                self.snake_direction = event.keysym</a:t>
             </a:r>
+            <a:endParaRPr sz="2400"/>
           </a:p>
         </p:txBody>
       </p:sp>
@@ -14498,7 +14732,7 @@
         <p:spPr>
           <a:xfrm>
             <a:off x="1016000" y="4850130"/>
-            <a:ext cx="10040620" cy="829945"/>
+            <a:ext cx="10040620" cy="460375"/>
           </a:xfrm>
           <a:prstGeom prst="rect">
             <a:avLst/>
@@ -14525,8 +14759,9 @@
             </a:r>
             <a:r>
               <a:rPr lang="en-US" altLang="zh-CN" sz="2400"/>
-              <a:t> function to connect change_direction function (see Tutorial 10)</a:t>
-            </a:r>
+              <a:t> function to connect change_direction function </a:t>
+            </a:r>
+            <a:endParaRPr lang="en-US" altLang="zh-CN" sz="2400"/>
           </a:p>
         </p:txBody>
       </p:sp>
@@ -14619,9 +14854,9 @@
               <a:solidFill>
                 <a:srgbClr val="383838"/>
               </a:solidFill>
-              <a:latin typeface="Times New Roman" panose="02020603050405020304" charset="0"/>
-              <a:ea typeface="Times New Roman" panose="02020603050405020304" charset="0"/>
-              <a:cs typeface="Times New Roman" panose="02020603050405020304" charset="0"/>
+              <a:latin typeface="Times New Roman" panose="02020503050405090304" charset="0"/>
+              <a:ea typeface="Times New Roman" panose="02020503050405090304" charset="0"/>
+              <a:cs typeface="Times New Roman" panose="02020503050405090304" charset="0"/>
               <a:sym typeface="+mn-ea"/>
             </a:endParaRPr>
           </a:p>
@@ -14640,7 +14875,7 @@
           </p:nvPr>
         </p:nvPicPr>
         <p:blipFill>
-          <a:blip r:embed="rId4"/>
+          <a:blip r:embed="rId2"/>
           <a:stretch>
             <a:fillRect/>
           </a:stretch>
@@ -14681,119 +14916,91 @@
               <a:rPr lang="zh-CN" altLang="en-US" sz="2400"/>
               <a:t>    def move_snake(self):</a:t>
             </a:r>
+            <a:endParaRPr lang="zh-CN" altLang="en-US" sz="2400"/>
           </a:p>
           <a:p>
             <a:r>
               <a:rPr lang="zh-CN" altLang="en-US" sz="2400"/>
               <a:t>        head_x, head_y = self.snake[0]</a:t>
             </a:r>
+            <a:endParaRPr lang="zh-CN" altLang="en-US" sz="2400"/>
           </a:p>
           <a:p>
             <a:r>
               <a:rPr lang="zh-CN" altLang="en-US" sz="2400"/>
               <a:t>        if self.snake_direction == 'Left':</a:t>
             </a:r>
+            <a:endParaRPr lang="zh-CN" altLang="en-US" sz="2400"/>
           </a:p>
           <a:p>
             <a:r>
               <a:rPr lang="zh-CN" altLang="en-US" sz="2400"/>
               <a:t>            head_x -= self.cell_size</a:t>
             </a:r>
+            <a:endParaRPr lang="zh-CN" altLang="en-US" sz="2400"/>
           </a:p>
           <a:p>
             <a:r>
               <a:rPr lang="zh-CN" altLang="en-US" sz="2400"/>
               <a:t>        elif self.snake_direction == 'Right':</a:t>
             </a:r>
+            <a:endParaRPr lang="zh-CN" altLang="en-US" sz="2400"/>
           </a:p>
           <a:p>
             <a:r>
               <a:rPr lang="zh-CN" altLang="en-US" sz="2400"/>
               <a:t>            head_x += self.cell_size</a:t>
             </a:r>
+            <a:endParaRPr lang="zh-CN" altLang="en-US" sz="2400"/>
           </a:p>
           <a:p>
             <a:r>
               <a:rPr lang="zh-CN" altLang="en-US" sz="2400"/>
               <a:t>        elif self.snake_direction == 'Up':</a:t>
             </a:r>
+            <a:endParaRPr lang="zh-CN" altLang="en-US" sz="2400"/>
           </a:p>
           <a:p>
             <a:r>
               <a:rPr lang="zh-CN" altLang="en-US" sz="2400"/>
               <a:t>            head_y -= self.cell_size</a:t>
             </a:r>
+            <a:endParaRPr lang="zh-CN" altLang="en-US" sz="2400"/>
           </a:p>
           <a:p>
             <a:r>
               <a:rPr lang="zh-CN" altLang="en-US" sz="2400"/>
               <a:t>        elif self.snake_direction == 'Down':</a:t>
             </a:r>
+            <a:endParaRPr lang="zh-CN" altLang="en-US" sz="2400"/>
           </a:p>
           <a:p>
             <a:r>
               <a:rPr lang="zh-CN" altLang="en-US" sz="2400"/>
               <a:t>            head_y += self.cell_size</a:t>
             </a:r>
+            <a:endParaRPr lang="zh-CN" altLang="en-US" sz="2400"/>
           </a:p>
           <a:p>
             <a:r>
               <a:rPr lang="zh-CN" altLang="en-US" sz="2400"/>
               <a:t>        new_head = (head_x, head_y)</a:t>
             </a:r>
+            <a:endParaRPr lang="zh-CN" altLang="en-US" sz="2400"/>
           </a:p>
           <a:p>
             <a:r>
               <a:rPr lang="zh-CN" altLang="en-US" sz="2400"/>
               <a:t>        self.snake = [new_head] + self.snake[:-1]</a:t>
             </a:r>
+            <a:endParaRPr lang="zh-CN" altLang="en-US" sz="2400"/>
           </a:p>
           <a:p>
             <a:r>
               <a:rPr lang="zh-CN" altLang="en-US" sz="2400"/>
               <a:t>        self.update_ui()</a:t>
             </a:r>
-          </a:p>
-        </p:txBody>
-      </p:sp>
-      <p:sp>
-        <p:nvSpPr>
-          <p:cNvPr id="5" name="文本框 4"/>
-          <p:cNvSpPr txBox="1"/>
-          <p:nvPr/>
-        </p:nvSpPr>
-        <p:spPr>
-          <a:xfrm>
-            <a:off x="7012940" y="1619250"/>
-            <a:ext cx="4064000" cy="1198880"/>
-          </a:xfrm>
-          <a:prstGeom prst="rect">
-            <a:avLst/>
-          </a:prstGeom>
-          <a:noFill/>
-        </p:spPr>
-        <p:txBody>
-          <a:bodyPr wrap="square" rtlCol="0">
-            <a:spAutoFit/>
-          </a:bodyPr>
-          <a:lstStyle/>
-          <a:p>
-            <a:r>
-              <a:rPr lang="en-US" altLang="zh-CN" sz="2400"/>
-              <a:t>You should also consider the timestep of </a:t>
-            </a:r>
-            <a:r>
-              <a:rPr lang="en-US" altLang="zh-CN" sz="2400">
-                <a:solidFill>
-                  <a:srgbClr val="FF0000"/>
-                </a:solidFill>
-              </a:rPr>
-              <a:t>eatting food and collision</a:t>
-            </a:r>
-            <a:r>
-              <a:rPr lang="en-US" altLang="zh-CN" sz="2400"/>
-              <a:t> in this function.</a:t>
-            </a:r>
+            <a:endParaRPr lang="zh-CN" altLang="en-US" sz="2400"/>
           </a:p>
         </p:txBody>
       </p:sp>
@@ -14850,9 +15057,9 @@
                 <a:solidFill>
                   <a:srgbClr val="2E0158"/>
                 </a:solidFill>
-                <a:latin typeface="Times New Roman" panose="02020603050405020304" charset="0"/>
-                <a:ea typeface="Times New Roman" panose="02020603050405020304" charset="0"/>
-                <a:cs typeface="Times New Roman" panose="02020603050405020304" charset="0"/>
+                <a:latin typeface="Times New Roman" panose="02020503050405090304" charset="0"/>
+                <a:ea typeface="Times New Roman" panose="02020503050405090304" charset="0"/>
+                <a:cs typeface="Times New Roman" panose="02020503050405090304" charset="0"/>
                 <a:sym typeface="+mn-ea"/>
               </a:rPr>
               <a:t>Run example code</a:t>
@@ -14893,13 +15100,34 @@
                 <a:solidFill>
                   <a:schemeClr val="tx1"/>
                 </a:solidFill>
-                <a:latin typeface="Times New Roman" panose="02020603050405020304" charset="0"/>
-                <a:ea typeface="Times New Roman" panose="02020603050405020304" charset="0"/>
-                <a:cs typeface="Times New Roman" panose="02020603050405020304" charset="0"/>
+                <a:latin typeface="Times New Roman" panose="02020503050405090304" charset="0"/>
+                <a:ea typeface="Times New Roman" panose="02020503050405090304" charset="0"/>
+                <a:cs typeface="Times New Roman" panose="02020503050405090304" charset="0"/>
                 <a:sym typeface="+mn-ea"/>
               </a:rPr>
-              <a:t>download the example code in bb and place it in your folder.</a:t>
-            </a:r>
+              <a:t>choose a python </a:t>
+            </a:r>
+            <a:r>
+              <a:rPr lang="en-US" sz="2000" dirty="0">
+                <a:solidFill>
+                  <a:schemeClr val="tx1"/>
+                </a:solidFill>
+                <a:latin typeface="Times New Roman" panose="02020503050405090304" charset="0"/>
+                <a:ea typeface="Times New Roman" panose="02020503050405090304" charset="0"/>
+                <a:cs typeface="Times New Roman" panose="02020503050405090304" charset="0"/>
+                <a:sym typeface="+mn-ea"/>
+              </a:rPr>
+              <a:t>IDE: pycharm/vscode</a:t>
+            </a:r>
+            <a:endParaRPr lang="en-US" sz="2000" dirty="0">
+              <a:solidFill>
+                <a:schemeClr val="tx1"/>
+              </a:solidFill>
+              <a:latin typeface="Times New Roman" panose="02020503050405090304" charset="0"/>
+              <a:ea typeface="Times New Roman" panose="02020503050405090304" charset="0"/>
+              <a:cs typeface="Times New Roman" panose="02020503050405090304" charset="0"/>
+              <a:sym typeface="+mn-ea"/>
+            </a:endParaRPr>
           </a:p>
           <a:p>
             <a:pPr marL="342900" indent="-342900" algn="l" fontAlgn="auto">
@@ -14914,13 +15142,22 @@
                 <a:solidFill>
                   <a:schemeClr val="tx1"/>
                 </a:solidFill>
-                <a:latin typeface="Times New Roman" panose="02020603050405020304" charset="0"/>
-                <a:ea typeface="Times New Roman" panose="02020603050405020304" charset="0"/>
-                <a:cs typeface="Times New Roman" panose="02020603050405020304" charset="0"/>
+                <a:latin typeface="Times New Roman" panose="02020503050405090304" charset="0"/>
+                <a:ea typeface="Times New Roman" panose="02020503050405090304" charset="0"/>
+                <a:cs typeface="Times New Roman" panose="02020503050405090304" charset="0"/>
                 <a:sym typeface="+mn-ea"/>
               </a:rPr>
-              <a:t>click file and open this py file.</a:t>
-            </a:r>
+              <a:t>download the example code in bb and place it in your folder.</a:t>
+            </a:r>
+            <a:endParaRPr lang="en-US" sz="2000" dirty="0">
+              <a:solidFill>
+                <a:schemeClr val="tx1"/>
+              </a:solidFill>
+              <a:latin typeface="Times New Roman" panose="02020503050405090304" charset="0"/>
+              <a:ea typeface="Times New Roman" panose="02020503050405090304" charset="0"/>
+              <a:cs typeface="Times New Roman" panose="02020503050405090304" charset="0"/>
+              <a:sym typeface="+mn-ea"/>
+            </a:endParaRPr>
           </a:p>
           <a:p>
             <a:pPr marL="342900" indent="-342900" algn="l" fontAlgn="auto">
@@ -14935,13 +15172,22 @@
                 <a:solidFill>
                   <a:schemeClr val="tx1"/>
                 </a:solidFill>
-                <a:latin typeface="Times New Roman" panose="02020603050405020304" charset="0"/>
-                <a:ea typeface="Times New Roman" panose="02020603050405020304" charset="0"/>
-                <a:cs typeface="Times New Roman" panose="02020603050405020304" charset="0"/>
+                <a:latin typeface="Times New Roman" panose="02020503050405090304" charset="0"/>
+                <a:ea typeface="Times New Roman" panose="02020503050405090304" charset="0"/>
+                <a:cs typeface="Times New Roman" panose="02020503050405090304" charset="0"/>
                 <a:sym typeface="+mn-ea"/>
               </a:rPr>
-              <a:t>configure conda environment or virual environment</a:t>
-            </a:r>
+              <a:t>click file and open this py file.</a:t>
+            </a:r>
+            <a:endParaRPr lang="en-US" sz="2000" dirty="0">
+              <a:solidFill>
+                <a:schemeClr val="tx1"/>
+              </a:solidFill>
+              <a:latin typeface="Times New Roman" panose="02020503050405090304" charset="0"/>
+              <a:ea typeface="Times New Roman" panose="02020503050405090304" charset="0"/>
+              <a:cs typeface="Times New Roman" panose="02020503050405090304" charset="0"/>
+              <a:sym typeface="+mn-ea"/>
+            </a:endParaRPr>
           </a:p>
           <a:p>
             <a:pPr marL="342900" indent="-342900" algn="l" fontAlgn="auto">
@@ -14956,13 +15202,52 @@
                 <a:solidFill>
                   <a:schemeClr val="tx1"/>
                 </a:solidFill>
-                <a:latin typeface="Times New Roman" panose="02020603050405020304" charset="0"/>
-                <a:ea typeface="Times New Roman" panose="02020603050405020304" charset="0"/>
-                <a:cs typeface="Times New Roman" panose="02020603050405020304" charset="0"/>
+                <a:latin typeface="Times New Roman" panose="02020503050405090304" charset="0"/>
+                <a:ea typeface="Times New Roman" panose="02020503050405090304" charset="0"/>
+                <a:cs typeface="Times New Roman" panose="02020503050405090304" charset="0"/>
+                <a:sym typeface="+mn-ea"/>
+              </a:rPr>
+              <a:t>configure conda environment or virual environment</a:t>
+            </a:r>
+            <a:endParaRPr lang="en-US" sz="2000" dirty="0">
+              <a:solidFill>
+                <a:schemeClr val="tx1"/>
+              </a:solidFill>
+              <a:latin typeface="Times New Roman" panose="02020503050405090304" charset="0"/>
+              <a:ea typeface="Times New Roman" panose="02020503050405090304" charset="0"/>
+              <a:cs typeface="Times New Roman" panose="02020503050405090304" charset="0"/>
+              <a:sym typeface="+mn-ea"/>
+            </a:endParaRPr>
+          </a:p>
+          <a:p>
+            <a:pPr marL="342900" indent="-342900" algn="l" fontAlgn="auto">
+              <a:lnSpc>
+                <a:spcPct val="100000"/>
+              </a:lnSpc>
+              <a:buSzPct val="100000"/>
+              <a:buChar char="•"/>
+            </a:pPr>
+            <a:r>
+              <a:rPr lang="en-US" sz="2000" dirty="0">
+                <a:solidFill>
+                  <a:schemeClr val="tx1"/>
+                </a:solidFill>
+                <a:latin typeface="Times New Roman" panose="02020503050405090304" charset="0"/>
+                <a:ea typeface="Times New Roman" panose="02020503050405090304" charset="0"/>
+                <a:cs typeface="Times New Roman" panose="02020503050405090304" charset="0"/>
                 <a:sym typeface="+mn-ea"/>
               </a:rPr>
               <a:t>configure run/debug setting to run this code.</a:t>
             </a:r>
+            <a:endParaRPr lang="en-US" sz="2000" dirty="0">
+              <a:solidFill>
+                <a:schemeClr val="tx1"/>
+              </a:solidFill>
+              <a:latin typeface="Times New Roman" panose="02020503050405090304" charset="0"/>
+              <a:ea typeface="Times New Roman" panose="02020503050405090304" charset="0"/>
+              <a:cs typeface="Times New Roman" panose="02020503050405090304" charset="0"/>
+              <a:sym typeface="+mn-ea"/>
+            </a:endParaRPr>
           </a:p>
         </p:txBody>
       </p:sp>
@@ -14979,7 +15264,7 @@
           </p:nvPr>
         </p:nvPicPr>
         <p:blipFill>
-          <a:blip r:embed="rId4"/>
+          <a:blip r:embed="rId2"/>
           <a:stretch>
             <a:fillRect/>
           </a:stretch>
@@ -15003,15 +15288,15 @@
           <p:nvPr/>
         </p:nvPicPr>
         <p:blipFill>
-          <a:blip r:embed="rId5"/>
+          <a:blip r:embed="rId3"/>
           <a:stretch>
             <a:fillRect/>
           </a:stretch>
         </p:blipFill>
         <p:spPr>
           <a:xfrm>
-            <a:off x="2510790" y="2976245"/>
-            <a:ext cx="6529070" cy="3453130"/>
+            <a:off x="3131820" y="3434080"/>
+            <a:ext cx="5814060" cy="3074670"/>
           </a:xfrm>
           <a:prstGeom prst="rect">
             <a:avLst/>
@@ -15071,9 +15356,9 @@
                 <a:solidFill>
                   <a:srgbClr val="646464"/>
                 </a:solidFill>
-                <a:latin typeface="Times New Roman" panose="02020603050405020304" charset="0"/>
-                <a:ea typeface="Times New Roman" panose="02020603050405020304" charset="0"/>
-                <a:cs typeface="Times New Roman" panose="02020603050405020304" charset="0"/>
+                <a:latin typeface="Times New Roman" panose="02020503050405090304" charset="0"/>
+                <a:ea typeface="Times New Roman" panose="02020503050405090304" charset="0"/>
+                <a:cs typeface="Times New Roman" panose="02020503050405090304" charset="0"/>
               </a:rPr>
               <a:t>THE END</a:t>
             </a:r>
@@ -15109,9 +15394,9 @@
                 <a:solidFill>
                   <a:srgbClr val="2E0158"/>
                 </a:solidFill>
-                <a:latin typeface="Times New Roman" panose="02020603050405020304" charset="0"/>
-                <a:ea typeface="Times New Roman" panose="02020603050405020304" charset="0"/>
-                <a:cs typeface="Times New Roman" panose="02020603050405020304" charset="0"/>
+                <a:latin typeface="Times New Roman" panose="02020503050405090304" charset="0"/>
+                <a:ea typeface="Times New Roman" panose="02020503050405090304" charset="0"/>
+                <a:cs typeface="Times New Roman" panose="02020503050405090304" charset="0"/>
               </a:rPr>
               <a:t>THANKS</a:t>
             </a:r>
@@ -15132,7 +15417,7 @@
           </p:nvPr>
         </p:nvPicPr>
         <p:blipFill>
-          <a:blip r:embed="rId4"/>
+          <a:blip r:embed="rId2"/>
           <a:stretch>
             <a:fillRect/>
           </a:stretch>
@@ -15156,56 +15441,56 @@
 </file>
 
 <file path=ppt/tags/tag1.xml><?xml version="1.0" encoding="utf-8"?>
-<p:tagLst xmlns:a="http://schemas.openxmlformats.org/drawingml/2006/main" xmlns:r="http://schemas.openxmlformats.org/officeDocument/2006/relationships" xmlns:p="http://schemas.openxmlformats.org/presentationml/2006/main">
-  <p:tag name="COMMONDATA" val="eyJoZGlkIjoiN2Y5N2YwNjU1YjcxOTZiOGYwOTJhNmQ0MzFjMDI5OWUifQ=="/>
+<p:tagLst xmlns:p="http://schemas.openxmlformats.org/presentationml/2006/main">
+  <p:tag name="KSO_WM_BEAUTIFY_FLAG" val=""/>
 </p:tagLst>
 </file>
 
 <file path=ppt/tags/tag2.xml><?xml version="1.0" encoding="utf-8"?>
-<p:tagLst xmlns:a="http://schemas.openxmlformats.org/drawingml/2006/main" xmlns:r="http://schemas.openxmlformats.org/officeDocument/2006/relationships" xmlns:p="http://schemas.openxmlformats.org/presentationml/2006/main">
+<p:tagLst xmlns:p="http://schemas.openxmlformats.org/presentationml/2006/main">
   <p:tag name="KSO_WM_BEAUTIFY_FLAG" val=""/>
 </p:tagLst>
 </file>
 
 <file path=ppt/tags/tag3.xml><?xml version="1.0" encoding="utf-8"?>
-<p:tagLst xmlns:a="http://schemas.openxmlformats.org/drawingml/2006/main" xmlns:r="http://schemas.openxmlformats.org/officeDocument/2006/relationships" xmlns:p="http://schemas.openxmlformats.org/presentationml/2006/main">
+<p:tagLst xmlns:p="http://schemas.openxmlformats.org/presentationml/2006/main">
   <p:tag name="KSO_WM_BEAUTIFY_FLAG" val=""/>
 </p:tagLst>
 </file>
 
 <file path=ppt/tags/tag4.xml><?xml version="1.0" encoding="utf-8"?>
-<p:tagLst xmlns:a="http://schemas.openxmlformats.org/drawingml/2006/main" xmlns:r="http://schemas.openxmlformats.org/officeDocument/2006/relationships" xmlns:p="http://schemas.openxmlformats.org/presentationml/2006/main">
+<p:tagLst xmlns:p="http://schemas.openxmlformats.org/presentationml/2006/main">
   <p:tag name="KSO_WM_BEAUTIFY_FLAG" val=""/>
 </p:tagLst>
 </file>
 
 <file path=ppt/tags/tag5.xml><?xml version="1.0" encoding="utf-8"?>
-<p:tagLst xmlns:a="http://schemas.openxmlformats.org/drawingml/2006/main" xmlns:r="http://schemas.openxmlformats.org/officeDocument/2006/relationships" xmlns:p="http://schemas.openxmlformats.org/presentationml/2006/main">
+<p:tagLst xmlns:p="http://schemas.openxmlformats.org/presentationml/2006/main">
   <p:tag name="KSO_WM_BEAUTIFY_FLAG" val=""/>
 </p:tagLst>
 </file>
 
 <file path=ppt/tags/tag6.xml><?xml version="1.0" encoding="utf-8"?>
-<p:tagLst xmlns:a="http://schemas.openxmlformats.org/drawingml/2006/main" xmlns:r="http://schemas.openxmlformats.org/officeDocument/2006/relationships" xmlns:p="http://schemas.openxmlformats.org/presentationml/2006/main">
+<p:tagLst xmlns:p="http://schemas.openxmlformats.org/presentationml/2006/main">
   <p:tag name="KSO_WM_BEAUTIFY_FLAG" val=""/>
 </p:tagLst>
 </file>
 
 <file path=ppt/tags/tag7.xml><?xml version="1.0" encoding="utf-8"?>
-<p:tagLst xmlns:a="http://schemas.openxmlformats.org/drawingml/2006/main" xmlns:r="http://schemas.openxmlformats.org/officeDocument/2006/relationships" xmlns:p="http://schemas.openxmlformats.org/presentationml/2006/main">
+<p:tagLst xmlns:p="http://schemas.openxmlformats.org/presentationml/2006/main">
   <p:tag name="KSO_WM_BEAUTIFY_FLAG" val=""/>
 </p:tagLst>
 </file>
 
 <file path=ppt/tags/tag8.xml><?xml version="1.0" encoding="utf-8"?>
-<p:tagLst xmlns:a="http://schemas.openxmlformats.org/drawingml/2006/main" xmlns:r="http://schemas.openxmlformats.org/officeDocument/2006/relationships" xmlns:p="http://schemas.openxmlformats.org/presentationml/2006/main">
+<p:tagLst xmlns:p="http://schemas.openxmlformats.org/presentationml/2006/main">
   <p:tag name="KSO_WM_BEAUTIFY_FLAG" val=""/>
 </p:tagLst>
 </file>
 
 <file path=ppt/tags/tag9.xml><?xml version="1.0" encoding="utf-8"?>
-<p:tagLst xmlns:a="http://schemas.openxmlformats.org/drawingml/2006/main" xmlns:r="http://schemas.openxmlformats.org/officeDocument/2006/relationships" xmlns:p="http://schemas.openxmlformats.org/presentationml/2006/main">
-  <p:tag name="KSO_WM_BEAUTIFY_FLAG" val=""/>
+<p:tagLst xmlns:p="http://schemas.openxmlformats.org/presentationml/2006/main">
+  <p:tag name="COMMONDATA" val="eyJoZGlkIjoiN2Y5N2YwNjU1YjcxOTZiOGYwOTJhNmQ0MzFjMDI5OWUifQ=="/>
 </p:tagLst>
 </file>
 
@@ -15452,8 +15737,6 @@
       </a:bgFillStyleLst>
     </a:fmtScheme>
   </a:themeElements>
-  <a:objectDefaults/>
-  <a:extraClrSchemeLst/>
   <a:extLst>
     <a:ext uri="{05A4C25C-085E-4340-85A3-A5531E510DB2}">
       <thm15:themeFamily xmlns:thm15="http://schemas.microsoft.com/office/thememl/2012/main" name="Office Theme" id="{62F939B6-93AF-4DB8-9C6B-D6C7DFDC589F}" vid="{4A3C46E8-61CC-4603-A589-7422A47A8E4A}"/>
@@ -15705,8 +15988,6 @@
       </a:bgFillStyleLst>
     </a:fmtScheme>
   </a:themeElements>
-  <a:objectDefaults/>
-  <a:extraClrSchemeLst/>
   <a:extLst>
     <a:ext uri="{05A4C25C-085E-4340-85A3-A5531E510DB2}">
       <thm15:themeFamily xmlns:thm15="http://schemas.microsoft.com/office/thememl/2012/main" name="Office Theme" id="{62F939B6-93AF-4DB8-9C6B-D6C7DFDC589F}" vid="{4A3C46E8-61CC-4603-A589-7422A47A8E4A}"/>
@@ -15958,8 +16239,6 @@
       </a:bgFillStyleLst>
     </a:fmtScheme>
   </a:themeElements>
-  <a:objectDefaults/>
-  <a:extraClrSchemeLst/>
   <a:extLst>
     <a:ext uri="{05A4C25C-085E-4340-85A3-A5531E510DB2}">
       <thm15:themeFamily xmlns:thm15="http://schemas.microsoft.com/office/thememl/2012/main" name="Office Theme" id="{62F939B6-93AF-4DB8-9C6B-D6C7DFDC589F}" vid="{4A3C46E8-61CC-4603-A589-7422A47A8E4A}"/>
@@ -16211,8 +16490,6 @@
       </a:bgFillStyleLst>
     </a:fmtScheme>
   </a:themeElements>
-  <a:objectDefaults/>
-  <a:extraClrSchemeLst/>
   <a:extLst>
     <a:ext uri="{05A4C25C-085E-4340-85A3-A5531E510DB2}">
       <thm15:themeFamily xmlns:thm15="http://schemas.microsoft.com/office/thememl/2012/main" name="Office Theme" id="{62F939B6-93AF-4DB8-9C6B-D6C7DFDC589F}" vid="{4A3C46E8-61CC-4603-A589-7422A47A8E4A}"/>
@@ -16472,8 +16749,6 @@
       </a:bgFillStyleLst>
     </a:fmtScheme>
   </a:themeElements>
-  <a:objectDefaults/>
-  <a:extraClrSchemeLst/>
   <a:extLst>
     <a:ext uri="{05A4C25C-085E-4340-85A3-A5531E510DB2}">
       <thm15:themeFamily xmlns:thm15="http://schemas.microsoft.com/office/thememl/2012/main" name="Office Theme" id="{62F939B6-93AF-4DB8-9C6B-D6C7DFDC589F}" vid="{4A3C46E8-61CC-4603-A589-7422A47A8E4A}"/>
